--- a/pptx_sessions_8_22/第16回_基礎編_受講者用.pptx
+++ b/pptx_sessions_8_22/第16回_基礎編_受講者用.pptx
@@ -1531,7 +1531,9 @@
           </a:ln>
         </p:spPr>
         <p:txBody>
-          <a:bodyPr/>
+          <a:bodyPr wrap="square">
+            <a:normAutofit/>
+          </a:bodyPr>
           <a:p/>
         </p:txBody>
       </p:sp>
@@ -1560,7 +1562,9 @@
           </a:ln>
         </p:spPr>
         <p:txBody>
-          <a:bodyPr/>
+          <a:bodyPr wrap="square">
+            <a:normAutofit/>
+          </a:bodyPr>
           <a:p/>
         </p:txBody>
       </p:sp>
@@ -1582,7 +1586,9 @@
           <a:ln/>
         </p:spPr>
         <p:txBody>
-          <a:bodyPr wrap="square" rtlCol="0" anchor="ctr"/>
+          <a:bodyPr wrap="square" rtlCol="0" anchor="ctr">
+            <a:normAutofit/>
+          </a:bodyPr>
           <a:lstStyle/>
           <a:p>
             <a:pPr algn="ctr" indent="0" marL="0">
@@ -1621,7 +1627,9 @@
           <a:ln/>
         </p:spPr>
         <p:txBody>
-          <a:bodyPr wrap="square" rtlCol="0" anchor="ctr"/>
+          <a:bodyPr wrap="square" rtlCol="0" anchor="ctr">
+            <a:normAutofit/>
+          </a:bodyPr>
           <a:lstStyle/>
           <a:p>
             <a:pPr algn="ctr" indent="0" marL="0">
@@ -1660,7 +1668,9 @@
           <a:ln/>
         </p:spPr>
         <p:txBody>
-          <a:bodyPr wrap="square" rtlCol="0" anchor="ctr"/>
+          <a:bodyPr wrap="square" rtlCol="0" anchor="ctr">
+            <a:normAutofit/>
+          </a:bodyPr>
           <a:lstStyle/>
           <a:p>
             <a:pPr algn="ctr" indent="0" marL="0">
@@ -1699,7 +1709,9 @@
           <a:ln/>
         </p:spPr>
         <p:txBody>
-          <a:bodyPr wrap="square" rtlCol="0" anchor="ctr"/>
+          <a:bodyPr wrap="square" rtlCol="0" anchor="ctr">
+            <a:normAutofit/>
+          </a:bodyPr>
           <a:lstStyle/>
           <a:p>
             <a:pPr algn="ctr" indent="0" marL="0">
@@ -1747,7 +1759,9 @@
           </a:ln>
         </p:spPr>
         <p:txBody>
-          <a:bodyPr/>
+          <a:bodyPr wrap="square">
+            <a:normAutofit/>
+          </a:bodyPr>
           <a:p/>
         </p:txBody>
       </p:sp>
@@ -1769,7 +1783,9 @@
           <a:ln/>
         </p:spPr>
         <p:txBody>
-          <a:bodyPr wrap="square" rtlCol="0" anchor="ctr"/>
+          <a:bodyPr wrap="square" rtlCol="0" anchor="ctr">
+            <a:normAutofit/>
+          </a:bodyPr>
           <a:lstStyle/>
           <a:p>
             <a:pPr algn="ctr" indent="0" marL="0">
@@ -1840,7 +1856,9 @@
           </a:ln>
         </p:spPr>
         <p:txBody>
-          <a:bodyPr/>
+          <a:bodyPr wrap="square">
+            <a:normAutofit/>
+          </a:bodyPr>
           <a:p/>
         </p:txBody>
       </p:sp>
@@ -1869,7 +1887,9 @@
           </a:ln>
         </p:spPr>
         <p:txBody>
-          <a:bodyPr/>
+          <a:bodyPr wrap="square">
+            <a:normAutofit/>
+          </a:bodyPr>
           <a:p/>
         </p:txBody>
       </p:sp>
@@ -1891,7 +1911,9 @@
           <a:ln/>
         </p:spPr>
         <p:txBody>
-          <a:bodyPr wrap="square" rtlCol="0" anchor="ctr"/>
+          <a:bodyPr wrap="square" rtlCol="0" anchor="ctr">
+            <a:normAutofit/>
+          </a:bodyPr>
           <a:lstStyle/>
           <a:p>
             <a:pPr indent="0" marL="0">
@@ -1930,7 +1952,9 @@
           <a:ln/>
         </p:spPr>
         <p:txBody>
-          <a:bodyPr wrap="square" rtlCol="0" anchor="ctr"/>
+          <a:bodyPr wrap="square" rtlCol="0" anchor="ctr">
+            <a:normAutofit/>
+          </a:bodyPr>
           <a:lstStyle/>
           <a:p>
             <a:pPr indent="0" marL="0">
@@ -1978,7 +2002,9 @@
           </a:ln>
         </p:spPr>
         <p:txBody>
-          <a:bodyPr/>
+          <a:bodyPr wrap="square">
+            <a:normAutofit/>
+          </a:bodyPr>
           <a:p/>
         </p:txBody>
       </p:sp>
@@ -2000,7 +2026,9 @@
           <a:ln/>
         </p:spPr>
         <p:txBody>
-          <a:bodyPr wrap="square" rtlCol="0" anchor="ctr"/>
+          <a:bodyPr wrap="square" rtlCol="0" anchor="ctr">
+            <a:normAutofit/>
+          </a:bodyPr>
           <a:lstStyle/>
           <a:p>
             <a:pPr indent="0" marL="0">
@@ -2039,7 +2067,9 @@
           <a:ln/>
         </p:spPr>
         <p:txBody>
-          <a:bodyPr wrap="square" rtlCol="0" anchor="ctr"/>
+          <a:bodyPr wrap="square" rtlCol="0" anchor="ctr">
+            <a:normAutofit/>
+          </a:bodyPr>
           <a:lstStyle/>
           <a:p>
             <a:pPr indent="0" marL="0">
@@ -2078,7 +2108,9 @@
           <a:ln/>
         </p:spPr>
         <p:txBody>
-          <a:bodyPr wrap="square" rtlCol="0" anchor="ctr"/>
+          <a:bodyPr wrap="square" rtlCol="0" anchor="ctr">
+            <a:normAutofit/>
+          </a:bodyPr>
           <a:lstStyle/>
           <a:p>
             <a:pPr indent="0" marL="0">
@@ -2126,7 +2158,9 @@
           </a:ln>
         </p:spPr>
         <p:txBody>
-          <a:bodyPr/>
+          <a:bodyPr wrap="square">
+            <a:normAutofit/>
+          </a:bodyPr>
           <a:p/>
         </p:txBody>
       </p:sp>
@@ -2148,7 +2182,9 @@
           <a:ln/>
         </p:spPr>
         <p:txBody>
-          <a:bodyPr wrap="square" rtlCol="0" anchor="ctr"/>
+          <a:bodyPr wrap="square" rtlCol="0" anchor="ctr">
+            <a:normAutofit/>
+          </a:bodyPr>
           <a:lstStyle/>
           <a:p>
             <a:pPr indent="0" marL="0">
@@ -2187,7 +2223,9 @@
           <a:ln/>
         </p:spPr>
         <p:txBody>
-          <a:bodyPr wrap="square" rtlCol="0" anchor="ctr"/>
+          <a:bodyPr wrap="square" rtlCol="0" anchor="ctr">
+            <a:normAutofit/>
+          </a:bodyPr>
           <a:lstStyle/>
           <a:p>
             <a:pPr indent="0" marL="0">
@@ -2226,7 +2264,9 @@
           <a:ln/>
         </p:spPr>
         <p:txBody>
-          <a:bodyPr wrap="square" rtlCol="0" anchor="ctr"/>
+          <a:bodyPr wrap="square" rtlCol="0" anchor="ctr">
+            <a:normAutofit/>
+          </a:bodyPr>
           <a:lstStyle/>
           <a:p>
             <a:pPr indent="0" marL="0">
@@ -2274,7 +2314,9 @@
           </a:ln>
         </p:spPr>
         <p:txBody>
-          <a:bodyPr/>
+          <a:bodyPr wrap="square">
+            <a:normAutofit/>
+          </a:bodyPr>
           <a:p/>
         </p:txBody>
       </p:sp>
@@ -2296,7 +2338,9 @@
           <a:ln/>
         </p:spPr>
         <p:txBody>
-          <a:bodyPr wrap="square" rtlCol="0" anchor="ctr"/>
+          <a:bodyPr wrap="square" rtlCol="0" anchor="ctr">
+            <a:normAutofit/>
+          </a:bodyPr>
           <a:lstStyle/>
           <a:p>
             <a:pPr indent="0" marL="0">
@@ -2335,7 +2379,9 @@
           <a:ln/>
         </p:spPr>
         <p:txBody>
-          <a:bodyPr wrap="square" rtlCol="0" anchor="ctr"/>
+          <a:bodyPr wrap="square" rtlCol="0" anchor="ctr">
+            <a:normAutofit/>
+          </a:bodyPr>
           <a:lstStyle/>
           <a:p>
             <a:pPr indent="0" marL="0">
@@ -2374,7 +2420,9 @@
           <a:ln/>
         </p:spPr>
         <p:txBody>
-          <a:bodyPr wrap="square" rtlCol="0" anchor="ctr"/>
+          <a:bodyPr wrap="square" rtlCol="0" anchor="ctr">
+            <a:normAutofit/>
+          </a:bodyPr>
           <a:lstStyle/>
           <a:p>
             <a:pPr indent="0" marL="0">
@@ -2413,7 +2461,9 @@
           <a:ln/>
         </p:spPr>
         <p:txBody>
-          <a:bodyPr wrap="square" rtlCol="0" anchor="ctr"/>
+          <a:bodyPr wrap="square" rtlCol="0" anchor="ctr">
+            <a:normAutofit/>
+          </a:bodyPr>
           <a:lstStyle/>
           <a:p>
             <a:pPr algn="r" indent="0" marL="0">
@@ -2484,7 +2534,9 @@
           </a:ln>
         </p:spPr>
         <p:txBody>
-          <a:bodyPr/>
+          <a:bodyPr wrap="square">
+            <a:normAutofit/>
+          </a:bodyPr>
           <a:p/>
         </p:txBody>
       </p:sp>
@@ -2513,7 +2565,9 @@
           </a:ln>
         </p:spPr>
         <p:txBody>
-          <a:bodyPr/>
+          <a:bodyPr wrap="square">
+            <a:normAutofit/>
+          </a:bodyPr>
           <a:p/>
         </p:txBody>
       </p:sp>
@@ -2535,7 +2589,9 @@
           <a:ln/>
         </p:spPr>
         <p:txBody>
-          <a:bodyPr wrap="square" rtlCol="0" anchor="ctr"/>
+          <a:bodyPr wrap="square" rtlCol="0" anchor="ctr">
+            <a:normAutofit/>
+          </a:bodyPr>
           <a:lstStyle/>
           <a:p>
             <a:pPr indent="0" marL="0">
@@ -2574,7 +2630,9 @@
           <a:ln/>
         </p:spPr>
         <p:txBody>
-          <a:bodyPr wrap="square" rtlCol="0" anchor="ctr"/>
+          <a:bodyPr wrap="square" rtlCol="0" anchor="ctr">
+            <a:normAutofit/>
+          </a:bodyPr>
           <a:lstStyle/>
           <a:p>
             <a:pPr indent="0" marL="0">
@@ -2620,7 +2678,9 @@
           </a:ln>
         </p:spPr>
         <p:txBody>
-          <a:bodyPr/>
+          <a:bodyPr wrap="square">
+            <a:normAutofit/>
+          </a:bodyPr>
           <a:p/>
         </p:txBody>
       </p:sp>
@@ -2651,7 +2711,9 @@
           </a:ln>
         </p:spPr>
         <p:txBody>
-          <a:bodyPr/>
+          <a:bodyPr wrap="square">
+            <a:normAutofit/>
+          </a:bodyPr>
           <a:p/>
         </p:txBody>
       </p:sp>
@@ -2673,7 +2735,9 @@
           <a:ln/>
         </p:spPr>
         <p:txBody>
-          <a:bodyPr wrap="square" rtlCol="0" anchor="ctr"/>
+          <a:bodyPr wrap="square" rtlCol="0" anchor="ctr">
+            <a:normAutofit/>
+          </a:bodyPr>
           <a:lstStyle/>
           <a:p>
             <a:pPr algn="ctr" indent="0" marL="0">
@@ -2712,7 +2776,9 @@
           <a:ln/>
         </p:spPr>
         <p:txBody>
-          <a:bodyPr wrap="square" rtlCol="0" anchor="ctr"/>
+          <a:bodyPr wrap="square" rtlCol="0" anchor="ctr">
+            <a:normAutofit/>
+          </a:bodyPr>
           <a:lstStyle/>
           <a:p>
             <a:pPr indent="0" marL="0">
@@ -2758,7 +2824,9 @@
           </a:ln>
         </p:spPr>
         <p:txBody>
-          <a:bodyPr/>
+          <a:bodyPr wrap="square">
+            <a:normAutofit/>
+          </a:bodyPr>
           <a:p/>
         </p:txBody>
       </p:sp>
@@ -2789,7 +2857,9 @@
           </a:ln>
         </p:spPr>
         <p:txBody>
-          <a:bodyPr/>
+          <a:bodyPr wrap="square">
+            <a:normAutofit/>
+          </a:bodyPr>
           <a:p/>
         </p:txBody>
       </p:sp>
@@ -2811,7 +2881,9 @@
           <a:ln/>
         </p:spPr>
         <p:txBody>
-          <a:bodyPr wrap="square" rtlCol="0" anchor="ctr"/>
+          <a:bodyPr wrap="square" rtlCol="0" anchor="ctr">
+            <a:normAutofit/>
+          </a:bodyPr>
           <a:lstStyle/>
           <a:p>
             <a:pPr algn="ctr" indent="0" marL="0">
@@ -2850,7 +2922,9 @@
           <a:ln/>
         </p:spPr>
         <p:txBody>
-          <a:bodyPr wrap="square" rtlCol="0" anchor="ctr"/>
+          <a:bodyPr wrap="square" rtlCol="0" anchor="ctr">
+            <a:normAutofit/>
+          </a:bodyPr>
           <a:lstStyle/>
           <a:p>
             <a:pPr indent="0" marL="0">
@@ -2889,7 +2963,9 @@
           <a:ln/>
         </p:spPr>
         <p:txBody>
-          <a:bodyPr wrap="square" rtlCol="0" anchor="ctr"/>
+          <a:bodyPr wrap="square" rtlCol="0" anchor="ctr">
+            <a:normAutofit/>
+          </a:bodyPr>
           <a:lstStyle/>
           <a:p>
             <a:pPr indent="0" marL="0">
@@ -2937,7 +3013,9 @@
           </a:ln>
         </p:spPr>
         <p:txBody>
-          <a:bodyPr/>
+          <a:bodyPr wrap="square">
+            <a:normAutofit/>
+          </a:bodyPr>
           <a:p/>
         </p:txBody>
       </p:sp>
@@ -2968,7 +3046,9 @@
           </a:ln>
         </p:spPr>
         <p:txBody>
-          <a:bodyPr/>
+          <a:bodyPr wrap="square">
+            <a:normAutofit/>
+          </a:bodyPr>
           <a:p/>
         </p:txBody>
       </p:sp>
@@ -2990,7 +3070,9 @@
           <a:ln/>
         </p:spPr>
         <p:txBody>
-          <a:bodyPr wrap="square" rtlCol="0" anchor="ctr"/>
+          <a:bodyPr wrap="square" rtlCol="0" anchor="ctr">
+            <a:normAutofit/>
+          </a:bodyPr>
           <a:lstStyle/>
           <a:p>
             <a:pPr algn="ctr" indent="0" marL="0">
@@ -3029,7 +3111,9 @@
           <a:ln/>
         </p:spPr>
         <p:txBody>
-          <a:bodyPr wrap="square" rtlCol="0" anchor="ctr"/>
+          <a:bodyPr wrap="square" rtlCol="0" anchor="ctr">
+            <a:normAutofit/>
+          </a:bodyPr>
           <a:lstStyle/>
           <a:p>
             <a:pPr indent="0" marL="0">
@@ -3077,7 +3161,9 @@
           </a:ln>
         </p:spPr>
         <p:txBody>
-          <a:bodyPr/>
+          <a:bodyPr wrap="square">
+            <a:normAutofit/>
+          </a:bodyPr>
           <a:p/>
         </p:txBody>
       </p:sp>
@@ -3108,7 +3194,9 @@
           </a:ln>
         </p:spPr>
         <p:txBody>
-          <a:bodyPr/>
+          <a:bodyPr wrap="square">
+            <a:normAutofit/>
+          </a:bodyPr>
           <a:p/>
         </p:txBody>
       </p:sp>
@@ -3130,7 +3218,9 @@
           <a:ln/>
         </p:spPr>
         <p:txBody>
-          <a:bodyPr wrap="square" rtlCol="0" anchor="ctr"/>
+          <a:bodyPr wrap="square" rtlCol="0" anchor="ctr">
+            <a:normAutofit/>
+          </a:bodyPr>
           <a:lstStyle/>
           <a:p>
             <a:pPr algn="ctr" indent="0" marL="0">
@@ -3169,7 +3259,9 @@
           <a:ln/>
         </p:spPr>
         <p:txBody>
-          <a:bodyPr wrap="square" rtlCol="0" anchor="ctr"/>
+          <a:bodyPr wrap="square" rtlCol="0" anchor="ctr">
+            <a:normAutofit/>
+          </a:bodyPr>
           <a:lstStyle/>
           <a:p>
             <a:pPr indent="0" marL="0">
@@ -3217,7 +3309,9 @@
           </a:ln>
         </p:spPr>
         <p:txBody>
-          <a:bodyPr/>
+          <a:bodyPr wrap="square">
+            <a:normAutofit/>
+          </a:bodyPr>
           <a:p/>
         </p:txBody>
       </p:sp>
@@ -3248,7 +3342,9 @@
           </a:ln>
         </p:spPr>
         <p:txBody>
-          <a:bodyPr/>
+          <a:bodyPr wrap="square">
+            <a:normAutofit/>
+          </a:bodyPr>
           <a:p/>
         </p:txBody>
       </p:sp>
@@ -3270,7 +3366,9 @@
           <a:ln/>
         </p:spPr>
         <p:txBody>
-          <a:bodyPr wrap="square" rtlCol="0" anchor="ctr"/>
+          <a:bodyPr wrap="square" rtlCol="0" anchor="ctr">
+            <a:normAutofit/>
+          </a:bodyPr>
           <a:lstStyle/>
           <a:p>
             <a:pPr algn="ctr" indent="0" marL="0">
@@ -3309,7 +3407,9 @@
           <a:ln/>
         </p:spPr>
         <p:txBody>
-          <a:bodyPr wrap="square" rtlCol="0" anchor="ctr"/>
+          <a:bodyPr wrap="square" rtlCol="0" anchor="ctr">
+            <a:normAutofit/>
+          </a:bodyPr>
           <a:lstStyle/>
           <a:p>
             <a:pPr indent="0" marL="0">
@@ -3357,7 +3457,9 @@
           </a:ln>
         </p:spPr>
         <p:txBody>
-          <a:bodyPr/>
+          <a:bodyPr wrap="square">
+            <a:normAutofit/>
+          </a:bodyPr>
           <a:p/>
         </p:txBody>
       </p:sp>
@@ -3388,7 +3490,9 @@
           </a:ln>
         </p:spPr>
         <p:txBody>
-          <a:bodyPr/>
+          <a:bodyPr wrap="square">
+            <a:normAutofit/>
+          </a:bodyPr>
           <a:p/>
         </p:txBody>
       </p:sp>
@@ -3410,7 +3514,9 @@
           <a:ln/>
         </p:spPr>
         <p:txBody>
-          <a:bodyPr wrap="square" rtlCol="0" anchor="ctr"/>
+          <a:bodyPr wrap="square" rtlCol="0" anchor="ctr">
+            <a:normAutofit/>
+          </a:bodyPr>
           <a:lstStyle/>
           <a:p>
             <a:pPr algn="ctr" indent="0" marL="0">
@@ -3449,7 +3555,9 @@
           <a:ln/>
         </p:spPr>
         <p:txBody>
-          <a:bodyPr wrap="square" rtlCol="0" anchor="ctr"/>
+          <a:bodyPr wrap="square" rtlCol="0" anchor="ctr">
+            <a:normAutofit/>
+          </a:bodyPr>
           <a:lstStyle/>
           <a:p>
             <a:pPr indent="0" marL="0">
@@ -3497,7 +3605,9 @@
           </a:ln>
         </p:spPr>
         <p:txBody>
-          <a:bodyPr/>
+          <a:bodyPr wrap="square">
+            <a:normAutofit/>
+          </a:bodyPr>
           <a:p/>
         </p:txBody>
       </p:sp>
@@ -3528,7 +3638,9 @@
           </a:ln>
         </p:spPr>
         <p:txBody>
-          <a:bodyPr/>
+          <a:bodyPr wrap="square">
+            <a:normAutofit/>
+          </a:bodyPr>
           <a:p/>
         </p:txBody>
       </p:sp>
@@ -3550,7 +3662,9 @@
           <a:ln/>
         </p:spPr>
         <p:txBody>
-          <a:bodyPr wrap="square" rtlCol="0" anchor="ctr"/>
+          <a:bodyPr wrap="square" rtlCol="0" anchor="ctr">
+            <a:normAutofit/>
+          </a:bodyPr>
           <a:lstStyle/>
           <a:p>
             <a:pPr algn="ctr" indent="0" marL="0">
@@ -3589,7 +3703,9 @@
           <a:ln/>
         </p:spPr>
         <p:txBody>
-          <a:bodyPr wrap="square" rtlCol="0" anchor="ctr"/>
+          <a:bodyPr wrap="square" rtlCol="0" anchor="ctr">
+            <a:normAutofit/>
+          </a:bodyPr>
           <a:lstStyle/>
           <a:p>
             <a:pPr indent="0" marL="0">
@@ -3628,7 +3744,9 @@
           <a:ln/>
         </p:spPr>
         <p:txBody>
-          <a:bodyPr wrap="square" rtlCol="0" anchor="ctr"/>
+          <a:bodyPr wrap="square" rtlCol="0" anchor="ctr">
+            <a:normAutofit/>
+          </a:bodyPr>
           <a:lstStyle/>
           <a:p>
             <a:pPr algn="r" indent="0" marL="0">
@@ -3699,7 +3817,9 @@
           </a:ln>
         </p:spPr>
         <p:txBody>
-          <a:bodyPr/>
+          <a:bodyPr wrap="square">
+            <a:normAutofit/>
+          </a:bodyPr>
           <a:p/>
         </p:txBody>
       </p:sp>
@@ -3728,7 +3848,9 @@
           </a:ln>
         </p:spPr>
         <p:txBody>
-          <a:bodyPr/>
+          <a:bodyPr wrap="square">
+            <a:normAutofit/>
+          </a:bodyPr>
           <a:p/>
         </p:txBody>
       </p:sp>
@@ -3759,7 +3881,9 @@
           </a:ln>
         </p:spPr>
         <p:txBody>
-          <a:bodyPr/>
+          <a:bodyPr wrap="square">
+            <a:normAutofit/>
+          </a:bodyPr>
           <a:p/>
         </p:txBody>
       </p:sp>
@@ -3781,7 +3905,9 @@
           <a:ln/>
         </p:spPr>
         <p:txBody>
-          <a:bodyPr wrap="square" rtlCol="0" anchor="ctr"/>
+          <a:bodyPr wrap="square" rtlCol="0" anchor="ctr">
+            <a:normAutofit/>
+          </a:bodyPr>
           <a:lstStyle/>
           <a:p>
             <a:pPr algn="ctr" indent="0" marL="0">
@@ -3820,7 +3946,9 @@
           <a:ln/>
         </p:spPr>
         <p:txBody>
-          <a:bodyPr wrap="square" rtlCol="0" anchor="ctr"/>
+          <a:bodyPr wrap="square" rtlCol="0" anchor="ctr">
+            <a:normAutofit/>
+          </a:bodyPr>
           <a:lstStyle/>
           <a:p>
             <a:pPr indent="0" marL="0">
@@ -3859,7 +3987,9 @@
           <a:ln/>
         </p:spPr>
         <p:txBody>
-          <a:bodyPr wrap="square" rtlCol="0" anchor="ctr"/>
+          <a:bodyPr wrap="square" rtlCol="0" anchor="ctr">
+            <a:normAutofit/>
+          </a:bodyPr>
           <a:lstStyle/>
           <a:p>
             <a:pPr indent="0" marL="0">
@@ -3907,7 +4037,9 @@
           </a:ln>
         </p:spPr>
         <p:txBody>
-          <a:bodyPr/>
+          <a:bodyPr wrap="square">
+            <a:normAutofit/>
+          </a:bodyPr>
           <a:p/>
         </p:txBody>
       </p:sp>
@@ -3929,7 +4061,9 @@
           <a:ln/>
         </p:spPr>
         <p:txBody>
-          <a:bodyPr wrap="square" rtlCol="0" anchor="ctr"/>
+          <a:bodyPr wrap="square" rtlCol="0" anchor="ctr">
+            <a:normAutofit/>
+          </a:bodyPr>
           <a:lstStyle/>
           <a:p>
             <a:pPr indent="0" marL="0">
@@ -3968,7 +4102,9 @@
           <a:ln/>
         </p:spPr>
         <p:txBody>
-          <a:bodyPr wrap="square" rtlCol="0" anchor="t"/>
+          <a:bodyPr wrap="square" rtlCol="0" anchor="t">
+            <a:normAutofit/>
+          </a:bodyPr>
           <a:lstStyle/>
           <a:p>
             <a:pPr indent="0" marL="0">
@@ -4126,7 +4262,9 @@
           <a:ln/>
         </p:spPr>
         <p:txBody>
-          <a:bodyPr wrap="square" rtlCol="0" anchor="ctr"/>
+          <a:bodyPr wrap="square" rtlCol="0" anchor="ctr">
+            <a:normAutofit/>
+          </a:bodyPr>
           <a:lstStyle/>
           <a:p>
             <a:pPr algn="r" indent="0" marL="0">
@@ -4197,7 +4335,9 @@
           </a:ln>
         </p:spPr>
         <p:txBody>
-          <a:bodyPr/>
+          <a:bodyPr wrap="square">
+            <a:normAutofit/>
+          </a:bodyPr>
           <a:p/>
         </p:txBody>
       </p:sp>
@@ -4226,7 +4366,9 @@
           </a:ln>
         </p:spPr>
         <p:txBody>
-          <a:bodyPr/>
+          <a:bodyPr wrap="square">
+            <a:normAutofit/>
+          </a:bodyPr>
           <a:p/>
         </p:txBody>
       </p:sp>
@@ -4257,7 +4399,9 @@
           </a:ln>
         </p:spPr>
         <p:txBody>
-          <a:bodyPr/>
+          <a:bodyPr wrap="square">
+            <a:normAutofit/>
+          </a:bodyPr>
           <a:p/>
         </p:txBody>
       </p:sp>
@@ -4279,7 +4423,9 @@
           <a:ln/>
         </p:spPr>
         <p:txBody>
-          <a:bodyPr wrap="square" rtlCol="0" anchor="ctr"/>
+          <a:bodyPr wrap="square" rtlCol="0" anchor="ctr">
+            <a:normAutofit/>
+          </a:bodyPr>
           <a:lstStyle/>
           <a:p>
             <a:pPr algn="ctr" indent="0" marL="0">
@@ -4318,7 +4464,9 @@
           <a:ln/>
         </p:spPr>
         <p:txBody>
-          <a:bodyPr wrap="square" rtlCol="0" anchor="ctr"/>
+          <a:bodyPr wrap="square" rtlCol="0" anchor="ctr">
+            <a:normAutofit/>
+          </a:bodyPr>
           <a:lstStyle/>
           <a:p>
             <a:pPr indent="0" marL="0">
@@ -4357,7 +4505,9 @@
           <a:ln/>
         </p:spPr>
         <p:txBody>
-          <a:bodyPr wrap="square" rtlCol="0" anchor="ctr"/>
+          <a:bodyPr wrap="square" rtlCol="0" anchor="ctr">
+            <a:normAutofit/>
+          </a:bodyPr>
           <a:lstStyle/>
           <a:p>
             <a:pPr indent="0" marL="0">
@@ -4405,7 +4555,9 @@
           </a:ln>
         </p:spPr>
         <p:txBody>
-          <a:bodyPr/>
+          <a:bodyPr wrap="square">
+            <a:normAutofit/>
+          </a:bodyPr>
           <a:p/>
         </p:txBody>
       </p:sp>
@@ -4427,7 +4579,9 @@
           <a:ln/>
         </p:spPr>
         <p:txBody>
-          <a:bodyPr wrap="square" rtlCol="0" anchor="ctr"/>
+          <a:bodyPr wrap="square" rtlCol="0" anchor="ctr">
+            <a:normAutofit/>
+          </a:bodyPr>
           <a:lstStyle/>
           <a:p>
             <a:pPr indent="0" marL="0">
@@ -4466,7 +4620,9 @@
           <a:ln/>
         </p:spPr>
         <p:txBody>
-          <a:bodyPr wrap="square" rtlCol="0" anchor="ctr"/>
+          <a:bodyPr wrap="square" rtlCol="0" anchor="ctr">
+            <a:normAutofit/>
+          </a:bodyPr>
           <a:lstStyle/>
           <a:p>
             <a:pPr indent="0" marL="0">
@@ -4505,7 +4661,9 @@
           <a:ln/>
         </p:spPr>
         <p:txBody>
-          <a:bodyPr wrap="square" rtlCol="0" anchor="t"/>
+          <a:bodyPr wrap="square" rtlCol="0" anchor="t">
+            <a:normAutofit/>
+          </a:bodyPr>
           <a:lstStyle/>
           <a:p>
             <a:pPr indent="0" marL="0">
@@ -4544,7 +4702,9 @@
           <a:ln/>
         </p:spPr>
         <p:txBody>
-          <a:bodyPr wrap="square" rtlCol="0" anchor="ctr"/>
+          <a:bodyPr wrap="square" rtlCol="0" anchor="ctr">
+            <a:normAutofit/>
+          </a:bodyPr>
           <a:lstStyle/>
           <a:p>
             <a:pPr indent="0" marL="0">
@@ -4583,7 +4743,9 @@
           <a:ln/>
         </p:spPr>
         <p:txBody>
-          <a:bodyPr wrap="square" rtlCol="0" anchor="t"/>
+          <a:bodyPr wrap="square" rtlCol="0" anchor="t">
+            <a:normAutofit/>
+          </a:bodyPr>
           <a:lstStyle/>
           <a:p>
             <a:pPr indent="0" marL="0">
@@ -4622,7 +4784,9 @@
           <a:ln/>
         </p:spPr>
         <p:txBody>
-          <a:bodyPr wrap="square" rtlCol="0" anchor="ctr"/>
+          <a:bodyPr wrap="square" rtlCol="0" anchor="ctr">
+            <a:normAutofit/>
+          </a:bodyPr>
           <a:lstStyle/>
           <a:p>
             <a:pPr indent="0" marL="0">
@@ -4661,7 +4825,9 @@
           <a:ln/>
         </p:spPr>
         <p:txBody>
-          <a:bodyPr wrap="square" rtlCol="0" anchor="t"/>
+          <a:bodyPr wrap="square" rtlCol="0" anchor="t">
+            <a:normAutofit/>
+          </a:bodyPr>
           <a:lstStyle/>
           <a:p>
             <a:pPr indent="0" marL="0">
@@ -4709,7 +4875,9 @@
           </a:ln>
         </p:spPr>
         <p:txBody>
-          <a:bodyPr/>
+          <a:bodyPr wrap="square">
+            <a:normAutofit/>
+          </a:bodyPr>
           <a:p/>
         </p:txBody>
       </p:sp>
@@ -4731,7 +4899,9 @@
           <a:ln/>
         </p:spPr>
         <p:txBody>
-          <a:bodyPr wrap="square" rtlCol="0" anchor="ctr"/>
+          <a:bodyPr wrap="square" rtlCol="0" anchor="ctr">
+            <a:normAutofit/>
+          </a:bodyPr>
           <a:lstStyle/>
           <a:p>
             <a:pPr indent="0" marL="0">
@@ -4770,7 +4940,9 @@
           <a:ln/>
         </p:spPr>
         <p:txBody>
-          <a:bodyPr wrap="square" rtlCol="0" anchor="t"/>
+          <a:bodyPr wrap="square" rtlCol="0" anchor="t">
+            <a:normAutofit/>
+          </a:bodyPr>
           <a:lstStyle/>
           <a:p>
             <a:pPr indent="0" marL="0">
@@ -4809,7 +4981,9 @@
           <a:ln/>
         </p:spPr>
         <p:txBody>
-          <a:bodyPr wrap="square" rtlCol="0" anchor="t"/>
+          <a:bodyPr wrap="square" rtlCol="0" anchor="t">
+            <a:normAutofit/>
+          </a:bodyPr>
           <a:lstStyle/>
           <a:p>
             <a:pPr indent="0" marL="0">
@@ -4848,7 +5022,9 @@
           <a:ln/>
         </p:spPr>
         <p:txBody>
-          <a:bodyPr wrap="square" rtlCol="0" anchor="t"/>
+          <a:bodyPr wrap="square" rtlCol="0" anchor="t">
+            <a:normAutofit/>
+          </a:bodyPr>
           <a:lstStyle/>
           <a:p>
             <a:pPr indent="0" marL="0">
@@ -4887,7 +5063,9 @@
           <a:ln/>
         </p:spPr>
         <p:txBody>
-          <a:bodyPr wrap="square" rtlCol="0" anchor="ctr"/>
+          <a:bodyPr wrap="square" rtlCol="0" anchor="ctr">
+            <a:normAutofit/>
+          </a:bodyPr>
           <a:lstStyle/>
           <a:p>
             <a:pPr algn="r" indent="0" marL="0">
@@ -4958,7 +5136,9 @@
           </a:ln>
         </p:spPr>
         <p:txBody>
-          <a:bodyPr/>
+          <a:bodyPr wrap="square">
+            <a:normAutofit/>
+          </a:bodyPr>
           <a:p/>
         </p:txBody>
       </p:sp>
@@ -4987,7 +5167,9 @@
           </a:ln>
         </p:spPr>
         <p:txBody>
-          <a:bodyPr/>
+          <a:bodyPr wrap="square">
+            <a:normAutofit/>
+          </a:bodyPr>
           <a:p/>
         </p:txBody>
       </p:sp>
@@ -5018,7 +5200,9 @@
           </a:ln>
         </p:spPr>
         <p:txBody>
-          <a:bodyPr/>
+          <a:bodyPr wrap="square">
+            <a:normAutofit/>
+          </a:bodyPr>
           <a:p/>
         </p:txBody>
       </p:sp>
@@ -5040,7 +5224,9 @@
           <a:ln/>
         </p:spPr>
         <p:txBody>
-          <a:bodyPr wrap="square" rtlCol="0" anchor="ctr"/>
+          <a:bodyPr wrap="square" rtlCol="0" anchor="ctr">
+            <a:normAutofit/>
+          </a:bodyPr>
           <a:lstStyle/>
           <a:p>
             <a:pPr algn="ctr" indent="0" marL="0">
@@ -5079,7 +5265,9 @@
           <a:ln/>
         </p:spPr>
         <p:txBody>
-          <a:bodyPr wrap="square" rtlCol="0" anchor="ctr"/>
+          <a:bodyPr wrap="square" rtlCol="0" anchor="ctr">
+            <a:normAutofit/>
+          </a:bodyPr>
           <a:lstStyle/>
           <a:p>
             <a:pPr indent="0" marL="0">
@@ -5118,7 +5306,9 @@
           <a:ln/>
         </p:spPr>
         <p:txBody>
-          <a:bodyPr wrap="square" rtlCol="0" anchor="ctr"/>
+          <a:bodyPr wrap="square" rtlCol="0" anchor="ctr">
+            <a:normAutofit/>
+          </a:bodyPr>
           <a:lstStyle/>
           <a:p>
             <a:pPr indent="0" marL="0">
@@ -5166,7 +5356,9 @@
           </a:ln>
         </p:spPr>
         <p:txBody>
-          <a:bodyPr/>
+          <a:bodyPr wrap="square">
+            <a:normAutofit/>
+          </a:bodyPr>
           <a:p/>
         </p:txBody>
       </p:sp>
@@ -5188,7 +5380,9 @@
           <a:ln/>
         </p:spPr>
         <p:txBody>
-          <a:bodyPr wrap="square" rtlCol="0" anchor="ctr"/>
+          <a:bodyPr wrap="square" rtlCol="0" anchor="ctr">
+            <a:normAutofit/>
+          </a:bodyPr>
           <a:lstStyle/>
           <a:p>
             <a:pPr indent="0" marL="0">
@@ -5227,7 +5421,9 @@
           <a:ln/>
         </p:spPr>
         <p:txBody>
-          <a:bodyPr wrap="square" rtlCol="0" anchor="t"/>
+          <a:bodyPr wrap="square" rtlCol="0" anchor="t">
+            <a:normAutofit/>
+          </a:bodyPr>
           <a:lstStyle/>
           <a:p>
             <a:pPr indent="0" marL="0">
@@ -5555,7 +5751,9 @@
           <a:ln/>
         </p:spPr>
         <p:txBody>
-          <a:bodyPr wrap="square" rtlCol="0" anchor="ctr"/>
+          <a:bodyPr wrap="square" rtlCol="0" anchor="ctr">
+            <a:normAutofit/>
+          </a:bodyPr>
           <a:lstStyle/>
           <a:p>
             <a:pPr algn="r" indent="0" marL="0">
@@ -5626,7 +5824,9 @@
           </a:ln>
         </p:spPr>
         <p:txBody>
-          <a:bodyPr/>
+          <a:bodyPr wrap="square">
+            <a:normAutofit/>
+          </a:bodyPr>
           <a:p/>
         </p:txBody>
       </p:sp>
@@ -5655,7 +5855,9 @@
           </a:ln>
         </p:spPr>
         <p:txBody>
-          <a:bodyPr/>
+          <a:bodyPr wrap="square">
+            <a:normAutofit/>
+          </a:bodyPr>
           <a:p/>
         </p:txBody>
       </p:sp>
@@ -5686,7 +5888,9 @@
           </a:ln>
         </p:spPr>
         <p:txBody>
-          <a:bodyPr/>
+          <a:bodyPr wrap="square">
+            <a:normAutofit/>
+          </a:bodyPr>
           <a:p/>
         </p:txBody>
       </p:sp>
@@ -5708,7 +5912,9 @@
           <a:ln/>
         </p:spPr>
         <p:txBody>
-          <a:bodyPr wrap="square" rtlCol="0" anchor="ctr"/>
+          <a:bodyPr wrap="square" rtlCol="0" anchor="ctr">
+            <a:normAutofit/>
+          </a:bodyPr>
           <a:lstStyle/>
           <a:p>
             <a:pPr algn="ctr" indent="0" marL="0">
@@ -5747,7 +5953,9 @@
           <a:ln/>
         </p:spPr>
         <p:txBody>
-          <a:bodyPr wrap="square" rtlCol="0" anchor="ctr"/>
+          <a:bodyPr wrap="square" rtlCol="0" anchor="ctr">
+            <a:normAutofit/>
+          </a:bodyPr>
           <a:lstStyle/>
           <a:p>
             <a:pPr indent="0" marL="0">
@@ -5786,7 +5994,9 @@
           <a:ln/>
         </p:spPr>
         <p:txBody>
-          <a:bodyPr wrap="square" rtlCol="0" anchor="ctr"/>
+          <a:bodyPr wrap="square" rtlCol="0" anchor="ctr">
+            <a:normAutofit/>
+          </a:bodyPr>
           <a:lstStyle/>
           <a:p>
             <a:pPr indent="0" marL="0">
@@ -5834,7 +6044,9 @@
           </a:ln>
         </p:spPr>
         <p:txBody>
-          <a:bodyPr/>
+          <a:bodyPr wrap="square">
+            <a:normAutofit/>
+          </a:bodyPr>
           <a:p/>
         </p:txBody>
       </p:sp>
@@ -5856,7 +6068,9 @@
           <a:ln/>
         </p:spPr>
         <p:txBody>
-          <a:bodyPr wrap="square" rtlCol="0" anchor="ctr"/>
+          <a:bodyPr wrap="square" rtlCol="0" anchor="ctr">
+            <a:normAutofit/>
+          </a:bodyPr>
           <a:lstStyle/>
           <a:p>
             <a:pPr indent="0" marL="0">
@@ -5895,7 +6109,9 @@
           <a:ln/>
         </p:spPr>
         <p:txBody>
-          <a:bodyPr wrap="square" rtlCol="0" anchor="ctr"/>
+          <a:bodyPr wrap="square" rtlCol="0" anchor="ctr">
+            <a:normAutofit/>
+          </a:bodyPr>
           <a:lstStyle/>
           <a:p>
             <a:pPr indent="0" marL="0">
@@ -5934,7 +6150,9 @@
           <a:ln/>
         </p:spPr>
         <p:txBody>
-          <a:bodyPr wrap="square" rtlCol="0" anchor="t"/>
+          <a:bodyPr wrap="square" rtlCol="0" anchor="t">
+            <a:normAutofit/>
+          </a:bodyPr>
           <a:lstStyle/>
           <a:p>
             <a:pPr indent="0" marL="0">
@@ -5973,7 +6191,9 @@
           <a:ln/>
         </p:spPr>
         <p:txBody>
-          <a:bodyPr wrap="square" rtlCol="0" anchor="ctr"/>
+          <a:bodyPr wrap="square" rtlCol="0" anchor="ctr">
+            <a:normAutofit/>
+          </a:bodyPr>
           <a:lstStyle/>
           <a:p>
             <a:pPr indent="0" marL="0">
@@ -6012,7 +6232,9 @@
           <a:ln/>
         </p:spPr>
         <p:txBody>
-          <a:bodyPr wrap="square" rtlCol="0" anchor="t"/>
+          <a:bodyPr wrap="square" rtlCol="0" anchor="t">
+            <a:normAutofit/>
+          </a:bodyPr>
           <a:lstStyle/>
           <a:p>
             <a:pPr indent="0" marL="0">
@@ -6051,7 +6273,9 @@
           <a:ln/>
         </p:spPr>
         <p:txBody>
-          <a:bodyPr wrap="square" rtlCol="0" anchor="ctr"/>
+          <a:bodyPr wrap="square" rtlCol="0" anchor="ctr">
+            <a:normAutofit/>
+          </a:bodyPr>
           <a:lstStyle/>
           <a:p>
             <a:pPr indent="0" marL="0">
@@ -6090,7 +6314,9 @@
           <a:ln/>
         </p:spPr>
         <p:txBody>
-          <a:bodyPr wrap="square" rtlCol="0" anchor="t"/>
+          <a:bodyPr wrap="square" rtlCol="0" anchor="t">
+            <a:normAutofit/>
+          </a:bodyPr>
           <a:lstStyle/>
           <a:p>
             <a:pPr indent="0" marL="0">
@@ -6138,7 +6364,9 @@
           </a:ln>
         </p:spPr>
         <p:txBody>
-          <a:bodyPr/>
+          <a:bodyPr wrap="square">
+            <a:normAutofit/>
+          </a:bodyPr>
           <a:p/>
         </p:txBody>
       </p:sp>
@@ -6160,7 +6388,9 @@
           <a:ln/>
         </p:spPr>
         <p:txBody>
-          <a:bodyPr wrap="square" rtlCol="0" anchor="ctr"/>
+          <a:bodyPr wrap="square" rtlCol="0" anchor="ctr">
+            <a:normAutofit/>
+          </a:bodyPr>
           <a:lstStyle/>
           <a:p>
             <a:pPr indent="0" marL="0">
@@ -6199,7 +6429,9 @@
           <a:ln/>
         </p:spPr>
         <p:txBody>
-          <a:bodyPr wrap="square" rtlCol="0" anchor="t"/>
+          <a:bodyPr wrap="square" rtlCol="0" anchor="t">
+            <a:normAutofit/>
+          </a:bodyPr>
           <a:lstStyle/>
           <a:p>
             <a:pPr indent="0" marL="0">
@@ -6238,7 +6470,9 @@
           <a:ln/>
         </p:spPr>
         <p:txBody>
-          <a:bodyPr wrap="square" rtlCol="0" anchor="t"/>
+          <a:bodyPr wrap="square" rtlCol="0" anchor="t">
+            <a:normAutofit/>
+          </a:bodyPr>
           <a:lstStyle/>
           <a:p>
             <a:pPr indent="0" marL="0">
@@ -6277,7 +6511,9 @@
           <a:ln/>
         </p:spPr>
         <p:txBody>
-          <a:bodyPr wrap="square" rtlCol="0" anchor="t"/>
+          <a:bodyPr wrap="square" rtlCol="0" anchor="t">
+            <a:normAutofit/>
+          </a:bodyPr>
           <a:lstStyle/>
           <a:p>
             <a:pPr indent="0" marL="0">
@@ -6316,7 +6552,9 @@
           <a:ln/>
         </p:spPr>
         <p:txBody>
-          <a:bodyPr wrap="square" rtlCol="0" anchor="ctr"/>
+          <a:bodyPr wrap="square" rtlCol="0" anchor="ctr">
+            <a:normAutofit/>
+          </a:bodyPr>
           <a:lstStyle/>
           <a:p>
             <a:pPr algn="r" indent="0" marL="0">
@@ -6387,7 +6625,9 @@
           </a:ln>
         </p:spPr>
         <p:txBody>
-          <a:bodyPr/>
+          <a:bodyPr wrap="square">
+            <a:normAutofit/>
+          </a:bodyPr>
           <a:p/>
         </p:txBody>
       </p:sp>
@@ -6416,7 +6656,9 @@
           </a:ln>
         </p:spPr>
         <p:txBody>
-          <a:bodyPr/>
+          <a:bodyPr wrap="square">
+            <a:normAutofit/>
+          </a:bodyPr>
           <a:p/>
         </p:txBody>
       </p:sp>
@@ -6447,7 +6689,9 @@
           </a:ln>
         </p:spPr>
         <p:txBody>
-          <a:bodyPr/>
+          <a:bodyPr wrap="square">
+            <a:normAutofit/>
+          </a:bodyPr>
           <a:p/>
         </p:txBody>
       </p:sp>
@@ -6469,7 +6713,9 @@
           <a:ln/>
         </p:spPr>
         <p:txBody>
-          <a:bodyPr wrap="square" rtlCol="0" anchor="ctr"/>
+          <a:bodyPr wrap="square" rtlCol="0" anchor="ctr">
+            <a:normAutofit/>
+          </a:bodyPr>
           <a:lstStyle/>
           <a:p>
             <a:pPr algn="ctr" indent="0" marL="0">
@@ -6508,7 +6754,9 @@
           <a:ln/>
         </p:spPr>
         <p:txBody>
-          <a:bodyPr wrap="square" rtlCol="0" anchor="ctr"/>
+          <a:bodyPr wrap="square" rtlCol="0" anchor="ctr">
+            <a:normAutofit/>
+          </a:bodyPr>
           <a:lstStyle/>
           <a:p>
             <a:pPr indent="0" marL="0">
@@ -6547,7 +6795,9 @@
           <a:ln/>
         </p:spPr>
         <p:txBody>
-          <a:bodyPr wrap="square" rtlCol="0" anchor="ctr"/>
+          <a:bodyPr wrap="square" rtlCol="0" anchor="ctr">
+            <a:normAutofit/>
+          </a:bodyPr>
           <a:lstStyle/>
           <a:p>
             <a:pPr indent="0" marL="0">
@@ -6595,7 +6845,9 @@
           </a:ln>
         </p:spPr>
         <p:txBody>
-          <a:bodyPr/>
+          <a:bodyPr wrap="square">
+            <a:normAutofit/>
+          </a:bodyPr>
           <a:p/>
         </p:txBody>
       </p:sp>
@@ -6617,7 +6869,9 @@
           <a:ln/>
         </p:spPr>
         <p:txBody>
-          <a:bodyPr wrap="square" rtlCol="0" anchor="ctr"/>
+          <a:bodyPr wrap="square" rtlCol="0" anchor="ctr">
+            <a:normAutofit/>
+          </a:bodyPr>
           <a:lstStyle/>
           <a:p>
             <a:pPr indent="0" marL="0">
@@ -6656,7 +6910,9 @@
           <a:ln/>
         </p:spPr>
         <p:txBody>
-          <a:bodyPr wrap="square" rtlCol="0" anchor="ctr"/>
+          <a:bodyPr wrap="square" rtlCol="0" anchor="ctr">
+            <a:normAutofit/>
+          </a:bodyPr>
           <a:lstStyle/>
           <a:p>
             <a:pPr indent="0" marL="0">
@@ -6695,7 +6951,9 @@
           <a:ln/>
         </p:spPr>
         <p:txBody>
-          <a:bodyPr wrap="square" rtlCol="0" anchor="t"/>
+          <a:bodyPr wrap="square" rtlCol="0" anchor="t">
+            <a:normAutofit/>
+          </a:bodyPr>
           <a:lstStyle/>
           <a:p>
             <a:pPr indent="0" marL="0">
@@ -6734,7 +6992,9 @@
           <a:ln/>
         </p:spPr>
         <p:txBody>
-          <a:bodyPr wrap="square" rtlCol="0" anchor="ctr"/>
+          <a:bodyPr wrap="square" rtlCol="0" anchor="ctr">
+            <a:normAutofit/>
+          </a:bodyPr>
           <a:lstStyle/>
           <a:p>
             <a:pPr indent="0" marL="0">
@@ -6773,7 +7033,9 @@
           <a:ln/>
         </p:spPr>
         <p:txBody>
-          <a:bodyPr wrap="square" rtlCol="0" anchor="t"/>
+          <a:bodyPr wrap="square" rtlCol="0" anchor="t">
+            <a:normAutofit/>
+          </a:bodyPr>
           <a:lstStyle/>
           <a:p>
             <a:pPr indent="0" marL="0">
@@ -6812,7 +7074,9 @@
           <a:ln/>
         </p:spPr>
         <p:txBody>
-          <a:bodyPr wrap="square" rtlCol="0" anchor="ctr"/>
+          <a:bodyPr wrap="square" rtlCol="0" anchor="ctr">
+            <a:normAutofit/>
+          </a:bodyPr>
           <a:lstStyle/>
           <a:p>
             <a:pPr indent="0" marL="0">
@@ -6851,7 +7115,9 @@
           <a:ln/>
         </p:spPr>
         <p:txBody>
-          <a:bodyPr wrap="square" rtlCol="0" anchor="t"/>
+          <a:bodyPr wrap="square" rtlCol="0" anchor="t">
+            <a:normAutofit/>
+          </a:bodyPr>
           <a:lstStyle/>
           <a:p>
             <a:pPr indent="0" marL="0">
@@ -6899,7 +7165,9 @@
           </a:ln>
         </p:spPr>
         <p:txBody>
-          <a:bodyPr/>
+          <a:bodyPr wrap="square">
+            <a:normAutofit/>
+          </a:bodyPr>
           <a:p/>
         </p:txBody>
       </p:sp>
@@ -6921,7 +7189,9 @@
           <a:ln/>
         </p:spPr>
         <p:txBody>
-          <a:bodyPr wrap="square" rtlCol="0" anchor="ctr"/>
+          <a:bodyPr wrap="square" rtlCol="0" anchor="ctr">
+            <a:normAutofit/>
+          </a:bodyPr>
           <a:lstStyle/>
           <a:p>
             <a:pPr indent="0" marL="0">
@@ -6960,7 +7230,9 @@
           <a:ln/>
         </p:spPr>
         <p:txBody>
-          <a:bodyPr wrap="square" rtlCol="0" anchor="t"/>
+          <a:bodyPr wrap="square" rtlCol="0" anchor="t">
+            <a:normAutofit/>
+          </a:bodyPr>
           <a:lstStyle/>
           <a:p>
             <a:pPr indent="0" marL="0">
@@ -6999,7 +7271,9 @@
           <a:ln/>
         </p:spPr>
         <p:txBody>
-          <a:bodyPr wrap="square" rtlCol="0" anchor="t"/>
+          <a:bodyPr wrap="square" rtlCol="0" anchor="t">
+            <a:normAutofit/>
+          </a:bodyPr>
           <a:lstStyle/>
           <a:p>
             <a:pPr indent="0" marL="0">
@@ -7038,7 +7312,9 @@
           <a:ln/>
         </p:spPr>
         <p:txBody>
-          <a:bodyPr wrap="square" rtlCol="0" anchor="t"/>
+          <a:bodyPr wrap="square" rtlCol="0" anchor="t">
+            <a:normAutofit/>
+          </a:bodyPr>
           <a:lstStyle/>
           <a:p>
             <a:pPr indent="0" marL="0">
@@ -7077,7 +7353,9 @@
           <a:ln/>
         </p:spPr>
         <p:txBody>
-          <a:bodyPr wrap="square" rtlCol="0" anchor="ctr"/>
+          <a:bodyPr wrap="square" rtlCol="0" anchor="ctr">
+            <a:normAutofit/>
+          </a:bodyPr>
           <a:lstStyle/>
           <a:p>
             <a:pPr algn="r" indent="0" marL="0">

--- a/pptx_sessions_8_22/第16回_基礎編_受講者用.pptx
+++ b/pptx_sessions_8_22/第16回_基礎編_受講者用.pptx
@@ -1531,9 +1531,7 @@
           </a:ln>
         </p:spPr>
         <p:txBody>
-          <a:bodyPr wrap="square">
-            <a:normAutofit/>
-          </a:bodyPr>
+          <a:bodyPr/>
           <a:p/>
         </p:txBody>
       </p:sp>
@@ -1562,9 +1560,7 @@
           </a:ln>
         </p:spPr>
         <p:txBody>
-          <a:bodyPr wrap="square">
-            <a:normAutofit/>
-          </a:bodyPr>
+          <a:bodyPr/>
           <a:p/>
         </p:txBody>
       </p:sp>
@@ -1586,9 +1582,7 @@
           <a:ln/>
         </p:spPr>
         <p:txBody>
-          <a:bodyPr wrap="square" rtlCol="0" anchor="ctr">
-            <a:normAutofit/>
-          </a:bodyPr>
+          <a:bodyPr wrap="square" rtlCol="0" anchor="ctr"/>
           <a:lstStyle/>
           <a:p>
             <a:pPr algn="ctr" indent="0" marL="0">
@@ -1627,9 +1621,7 @@
           <a:ln/>
         </p:spPr>
         <p:txBody>
-          <a:bodyPr wrap="square" rtlCol="0" anchor="ctr">
-            <a:normAutofit/>
-          </a:bodyPr>
+          <a:bodyPr wrap="square" rtlCol="0" anchor="ctr"/>
           <a:lstStyle/>
           <a:p>
             <a:pPr algn="ctr" indent="0" marL="0">
@@ -1668,9 +1660,7 @@
           <a:ln/>
         </p:spPr>
         <p:txBody>
-          <a:bodyPr wrap="square" rtlCol="0" anchor="ctr">
-            <a:normAutofit/>
-          </a:bodyPr>
+          <a:bodyPr wrap="square" rtlCol="0" anchor="ctr"/>
           <a:lstStyle/>
           <a:p>
             <a:pPr algn="ctr" indent="0" marL="0">
@@ -1709,9 +1699,7 @@
           <a:ln/>
         </p:spPr>
         <p:txBody>
-          <a:bodyPr wrap="square" rtlCol="0" anchor="ctr">
-            <a:normAutofit/>
-          </a:bodyPr>
+          <a:bodyPr wrap="square" rtlCol="0" anchor="ctr"/>
           <a:lstStyle/>
           <a:p>
             <a:pPr algn="ctr" indent="0" marL="0">
@@ -1759,9 +1747,7 @@
           </a:ln>
         </p:spPr>
         <p:txBody>
-          <a:bodyPr wrap="square">
-            <a:normAutofit/>
-          </a:bodyPr>
+          <a:bodyPr/>
           <a:p/>
         </p:txBody>
       </p:sp>
@@ -1783,9 +1769,7 @@
           <a:ln/>
         </p:spPr>
         <p:txBody>
-          <a:bodyPr wrap="square" rtlCol="0" anchor="ctr">
-            <a:normAutofit/>
-          </a:bodyPr>
+          <a:bodyPr wrap="square" rtlCol="0" anchor="ctr"/>
           <a:lstStyle/>
           <a:p>
             <a:pPr algn="ctr" indent="0" marL="0">
@@ -1856,9 +1840,7 @@
           </a:ln>
         </p:spPr>
         <p:txBody>
-          <a:bodyPr wrap="square">
-            <a:normAutofit/>
-          </a:bodyPr>
+          <a:bodyPr/>
           <a:p/>
         </p:txBody>
       </p:sp>
@@ -1887,9 +1869,7 @@
           </a:ln>
         </p:spPr>
         <p:txBody>
-          <a:bodyPr wrap="square">
-            <a:normAutofit/>
-          </a:bodyPr>
+          <a:bodyPr/>
           <a:p/>
         </p:txBody>
       </p:sp>
@@ -1911,9 +1891,7 @@
           <a:ln/>
         </p:spPr>
         <p:txBody>
-          <a:bodyPr wrap="square" rtlCol="0" anchor="ctr">
-            <a:normAutofit/>
-          </a:bodyPr>
+          <a:bodyPr wrap="square" rtlCol="0" anchor="ctr"/>
           <a:lstStyle/>
           <a:p>
             <a:pPr indent="0" marL="0">
@@ -1952,9 +1930,7 @@
           <a:ln/>
         </p:spPr>
         <p:txBody>
-          <a:bodyPr wrap="square" rtlCol="0" anchor="ctr">
-            <a:normAutofit/>
-          </a:bodyPr>
+          <a:bodyPr wrap="square" rtlCol="0" anchor="ctr"/>
           <a:lstStyle/>
           <a:p>
             <a:pPr indent="0" marL="0">
@@ -2002,9 +1978,7 @@
           </a:ln>
         </p:spPr>
         <p:txBody>
-          <a:bodyPr wrap="square">
-            <a:normAutofit/>
-          </a:bodyPr>
+          <a:bodyPr/>
           <a:p/>
         </p:txBody>
       </p:sp>
@@ -2026,9 +2000,7 @@
           <a:ln/>
         </p:spPr>
         <p:txBody>
-          <a:bodyPr wrap="square" rtlCol="0" anchor="ctr">
-            <a:normAutofit/>
-          </a:bodyPr>
+          <a:bodyPr wrap="square" rtlCol="0" anchor="ctr"/>
           <a:lstStyle/>
           <a:p>
             <a:pPr indent="0" marL="0">
@@ -2067,9 +2039,7 @@
           <a:ln/>
         </p:spPr>
         <p:txBody>
-          <a:bodyPr wrap="square" rtlCol="0" anchor="ctr">
-            <a:normAutofit/>
-          </a:bodyPr>
+          <a:bodyPr wrap="square" rtlCol="0" anchor="ctr"/>
           <a:lstStyle/>
           <a:p>
             <a:pPr indent="0" marL="0">
@@ -2108,9 +2078,7 @@
           <a:ln/>
         </p:spPr>
         <p:txBody>
-          <a:bodyPr wrap="square" rtlCol="0" anchor="ctr">
-            <a:normAutofit/>
-          </a:bodyPr>
+          <a:bodyPr wrap="square" rtlCol="0" anchor="ctr"/>
           <a:lstStyle/>
           <a:p>
             <a:pPr indent="0" marL="0">
@@ -2158,9 +2126,7 @@
           </a:ln>
         </p:spPr>
         <p:txBody>
-          <a:bodyPr wrap="square">
-            <a:normAutofit/>
-          </a:bodyPr>
+          <a:bodyPr/>
           <a:p/>
         </p:txBody>
       </p:sp>
@@ -2182,9 +2148,7 @@
           <a:ln/>
         </p:spPr>
         <p:txBody>
-          <a:bodyPr wrap="square" rtlCol="0" anchor="ctr">
-            <a:normAutofit/>
-          </a:bodyPr>
+          <a:bodyPr wrap="square" rtlCol="0" anchor="ctr"/>
           <a:lstStyle/>
           <a:p>
             <a:pPr indent="0" marL="0">
@@ -2223,9 +2187,7 @@
           <a:ln/>
         </p:spPr>
         <p:txBody>
-          <a:bodyPr wrap="square" rtlCol="0" anchor="ctr">
-            <a:normAutofit/>
-          </a:bodyPr>
+          <a:bodyPr wrap="square" rtlCol="0" anchor="ctr"/>
           <a:lstStyle/>
           <a:p>
             <a:pPr indent="0" marL="0">
@@ -2264,9 +2226,7 @@
           <a:ln/>
         </p:spPr>
         <p:txBody>
-          <a:bodyPr wrap="square" rtlCol="0" anchor="ctr">
-            <a:normAutofit/>
-          </a:bodyPr>
+          <a:bodyPr wrap="square" rtlCol="0" anchor="ctr"/>
           <a:lstStyle/>
           <a:p>
             <a:pPr indent="0" marL="0">
@@ -2314,9 +2274,7 @@
           </a:ln>
         </p:spPr>
         <p:txBody>
-          <a:bodyPr wrap="square">
-            <a:normAutofit/>
-          </a:bodyPr>
+          <a:bodyPr/>
           <a:p/>
         </p:txBody>
       </p:sp>
@@ -2338,9 +2296,7 @@
           <a:ln/>
         </p:spPr>
         <p:txBody>
-          <a:bodyPr wrap="square" rtlCol="0" anchor="ctr">
-            <a:normAutofit/>
-          </a:bodyPr>
+          <a:bodyPr wrap="square" rtlCol="0" anchor="ctr"/>
           <a:lstStyle/>
           <a:p>
             <a:pPr indent="0" marL="0">
@@ -2379,9 +2335,7 @@
           <a:ln/>
         </p:spPr>
         <p:txBody>
-          <a:bodyPr wrap="square" rtlCol="0" anchor="ctr">
-            <a:normAutofit/>
-          </a:bodyPr>
+          <a:bodyPr wrap="square" rtlCol="0" anchor="ctr"/>
           <a:lstStyle/>
           <a:p>
             <a:pPr indent="0" marL="0">
@@ -2420,9 +2374,7 @@
           <a:ln/>
         </p:spPr>
         <p:txBody>
-          <a:bodyPr wrap="square" rtlCol="0" anchor="ctr">
-            <a:normAutofit/>
-          </a:bodyPr>
+          <a:bodyPr wrap="square" rtlCol="0" anchor="ctr"/>
           <a:lstStyle/>
           <a:p>
             <a:pPr indent="0" marL="0">
@@ -2461,9 +2413,7 @@
           <a:ln/>
         </p:spPr>
         <p:txBody>
-          <a:bodyPr wrap="square" rtlCol="0" anchor="ctr">
-            <a:normAutofit/>
-          </a:bodyPr>
+          <a:bodyPr wrap="square" rtlCol="0" anchor="ctr"/>
           <a:lstStyle/>
           <a:p>
             <a:pPr algn="r" indent="0" marL="0">
@@ -2534,9 +2484,7 @@
           </a:ln>
         </p:spPr>
         <p:txBody>
-          <a:bodyPr wrap="square">
-            <a:normAutofit/>
-          </a:bodyPr>
+          <a:bodyPr/>
           <a:p/>
         </p:txBody>
       </p:sp>
@@ -2565,9 +2513,7 @@
           </a:ln>
         </p:spPr>
         <p:txBody>
-          <a:bodyPr wrap="square">
-            <a:normAutofit/>
-          </a:bodyPr>
+          <a:bodyPr/>
           <a:p/>
         </p:txBody>
       </p:sp>
@@ -2589,9 +2535,7 @@
           <a:ln/>
         </p:spPr>
         <p:txBody>
-          <a:bodyPr wrap="square" rtlCol="0" anchor="ctr">
-            <a:normAutofit/>
-          </a:bodyPr>
+          <a:bodyPr wrap="square" rtlCol="0" anchor="ctr"/>
           <a:lstStyle/>
           <a:p>
             <a:pPr indent="0" marL="0">
@@ -2630,9 +2574,7 @@
           <a:ln/>
         </p:spPr>
         <p:txBody>
-          <a:bodyPr wrap="square" rtlCol="0" anchor="ctr">
-            <a:normAutofit/>
-          </a:bodyPr>
+          <a:bodyPr wrap="square" rtlCol="0" anchor="ctr"/>
           <a:lstStyle/>
           <a:p>
             <a:pPr indent="0" marL="0">
@@ -2678,9 +2620,7 @@
           </a:ln>
         </p:spPr>
         <p:txBody>
-          <a:bodyPr wrap="square">
-            <a:normAutofit/>
-          </a:bodyPr>
+          <a:bodyPr/>
           <a:p/>
         </p:txBody>
       </p:sp>
@@ -2711,9 +2651,7 @@
           </a:ln>
         </p:spPr>
         <p:txBody>
-          <a:bodyPr wrap="square">
-            <a:normAutofit/>
-          </a:bodyPr>
+          <a:bodyPr/>
           <a:p/>
         </p:txBody>
       </p:sp>
@@ -2735,9 +2673,7 @@
           <a:ln/>
         </p:spPr>
         <p:txBody>
-          <a:bodyPr wrap="square" rtlCol="0" anchor="ctr">
-            <a:normAutofit/>
-          </a:bodyPr>
+          <a:bodyPr wrap="square" rtlCol="0" anchor="ctr"/>
           <a:lstStyle/>
           <a:p>
             <a:pPr algn="ctr" indent="0" marL="0">
@@ -2776,9 +2712,7 @@
           <a:ln/>
         </p:spPr>
         <p:txBody>
-          <a:bodyPr wrap="square" rtlCol="0" anchor="ctr">
-            <a:normAutofit/>
-          </a:bodyPr>
+          <a:bodyPr wrap="square" rtlCol="0" anchor="ctr"/>
           <a:lstStyle/>
           <a:p>
             <a:pPr indent="0" marL="0">
@@ -2824,9 +2758,7 @@
           </a:ln>
         </p:spPr>
         <p:txBody>
-          <a:bodyPr wrap="square">
-            <a:normAutofit/>
-          </a:bodyPr>
+          <a:bodyPr/>
           <a:p/>
         </p:txBody>
       </p:sp>
@@ -2857,9 +2789,7 @@
           </a:ln>
         </p:spPr>
         <p:txBody>
-          <a:bodyPr wrap="square">
-            <a:normAutofit/>
-          </a:bodyPr>
+          <a:bodyPr/>
           <a:p/>
         </p:txBody>
       </p:sp>
@@ -2881,9 +2811,7 @@
           <a:ln/>
         </p:spPr>
         <p:txBody>
-          <a:bodyPr wrap="square" rtlCol="0" anchor="ctr">
-            <a:normAutofit/>
-          </a:bodyPr>
+          <a:bodyPr wrap="square" rtlCol="0" anchor="ctr"/>
           <a:lstStyle/>
           <a:p>
             <a:pPr algn="ctr" indent="0" marL="0">
@@ -2922,9 +2850,7 @@
           <a:ln/>
         </p:spPr>
         <p:txBody>
-          <a:bodyPr wrap="square" rtlCol="0" anchor="ctr">
-            <a:normAutofit/>
-          </a:bodyPr>
+          <a:bodyPr wrap="square" rtlCol="0" anchor="ctr"/>
           <a:lstStyle/>
           <a:p>
             <a:pPr indent="0" marL="0">
@@ -2963,9 +2889,7 @@
           <a:ln/>
         </p:spPr>
         <p:txBody>
-          <a:bodyPr wrap="square" rtlCol="0" anchor="ctr">
-            <a:normAutofit/>
-          </a:bodyPr>
+          <a:bodyPr wrap="square" rtlCol="0" anchor="ctr"/>
           <a:lstStyle/>
           <a:p>
             <a:pPr indent="0" marL="0">
@@ -3013,9 +2937,7 @@
           </a:ln>
         </p:spPr>
         <p:txBody>
-          <a:bodyPr wrap="square">
-            <a:normAutofit/>
-          </a:bodyPr>
+          <a:bodyPr/>
           <a:p/>
         </p:txBody>
       </p:sp>
@@ -3046,9 +2968,7 @@
           </a:ln>
         </p:spPr>
         <p:txBody>
-          <a:bodyPr wrap="square">
-            <a:normAutofit/>
-          </a:bodyPr>
+          <a:bodyPr/>
           <a:p/>
         </p:txBody>
       </p:sp>
@@ -3070,9 +2990,7 @@
           <a:ln/>
         </p:spPr>
         <p:txBody>
-          <a:bodyPr wrap="square" rtlCol="0" anchor="ctr">
-            <a:normAutofit/>
-          </a:bodyPr>
+          <a:bodyPr wrap="square" rtlCol="0" anchor="ctr"/>
           <a:lstStyle/>
           <a:p>
             <a:pPr algn="ctr" indent="0" marL="0">
@@ -3111,9 +3029,7 @@
           <a:ln/>
         </p:spPr>
         <p:txBody>
-          <a:bodyPr wrap="square" rtlCol="0" anchor="ctr">
-            <a:normAutofit/>
-          </a:bodyPr>
+          <a:bodyPr wrap="square" rtlCol="0" anchor="ctr"/>
           <a:lstStyle/>
           <a:p>
             <a:pPr indent="0" marL="0">
@@ -3161,9 +3077,7 @@
           </a:ln>
         </p:spPr>
         <p:txBody>
-          <a:bodyPr wrap="square">
-            <a:normAutofit/>
-          </a:bodyPr>
+          <a:bodyPr/>
           <a:p/>
         </p:txBody>
       </p:sp>
@@ -3194,9 +3108,7 @@
           </a:ln>
         </p:spPr>
         <p:txBody>
-          <a:bodyPr wrap="square">
-            <a:normAutofit/>
-          </a:bodyPr>
+          <a:bodyPr/>
           <a:p/>
         </p:txBody>
       </p:sp>
@@ -3218,9 +3130,7 @@
           <a:ln/>
         </p:spPr>
         <p:txBody>
-          <a:bodyPr wrap="square" rtlCol="0" anchor="ctr">
-            <a:normAutofit/>
-          </a:bodyPr>
+          <a:bodyPr wrap="square" rtlCol="0" anchor="ctr"/>
           <a:lstStyle/>
           <a:p>
             <a:pPr algn="ctr" indent="0" marL="0">
@@ -3259,9 +3169,7 @@
           <a:ln/>
         </p:spPr>
         <p:txBody>
-          <a:bodyPr wrap="square" rtlCol="0" anchor="ctr">
-            <a:normAutofit/>
-          </a:bodyPr>
+          <a:bodyPr wrap="square" rtlCol="0" anchor="ctr"/>
           <a:lstStyle/>
           <a:p>
             <a:pPr indent="0" marL="0">
@@ -3309,9 +3217,7 @@
           </a:ln>
         </p:spPr>
         <p:txBody>
-          <a:bodyPr wrap="square">
-            <a:normAutofit/>
-          </a:bodyPr>
+          <a:bodyPr/>
           <a:p/>
         </p:txBody>
       </p:sp>
@@ -3342,9 +3248,7 @@
           </a:ln>
         </p:spPr>
         <p:txBody>
-          <a:bodyPr wrap="square">
-            <a:normAutofit/>
-          </a:bodyPr>
+          <a:bodyPr/>
           <a:p/>
         </p:txBody>
       </p:sp>
@@ -3366,9 +3270,7 @@
           <a:ln/>
         </p:spPr>
         <p:txBody>
-          <a:bodyPr wrap="square" rtlCol="0" anchor="ctr">
-            <a:normAutofit/>
-          </a:bodyPr>
+          <a:bodyPr wrap="square" rtlCol="0" anchor="ctr"/>
           <a:lstStyle/>
           <a:p>
             <a:pPr algn="ctr" indent="0" marL="0">
@@ -3407,9 +3309,7 @@
           <a:ln/>
         </p:spPr>
         <p:txBody>
-          <a:bodyPr wrap="square" rtlCol="0" anchor="ctr">
-            <a:normAutofit/>
-          </a:bodyPr>
+          <a:bodyPr wrap="square" rtlCol="0" anchor="ctr"/>
           <a:lstStyle/>
           <a:p>
             <a:pPr indent="0" marL="0">
@@ -3457,9 +3357,7 @@
           </a:ln>
         </p:spPr>
         <p:txBody>
-          <a:bodyPr wrap="square">
-            <a:normAutofit/>
-          </a:bodyPr>
+          <a:bodyPr/>
           <a:p/>
         </p:txBody>
       </p:sp>
@@ -3490,9 +3388,7 @@
           </a:ln>
         </p:spPr>
         <p:txBody>
-          <a:bodyPr wrap="square">
-            <a:normAutofit/>
-          </a:bodyPr>
+          <a:bodyPr/>
           <a:p/>
         </p:txBody>
       </p:sp>
@@ -3514,9 +3410,7 @@
           <a:ln/>
         </p:spPr>
         <p:txBody>
-          <a:bodyPr wrap="square" rtlCol="0" anchor="ctr">
-            <a:normAutofit/>
-          </a:bodyPr>
+          <a:bodyPr wrap="square" rtlCol="0" anchor="ctr"/>
           <a:lstStyle/>
           <a:p>
             <a:pPr algn="ctr" indent="0" marL="0">
@@ -3555,9 +3449,7 @@
           <a:ln/>
         </p:spPr>
         <p:txBody>
-          <a:bodyPr wrap="square" rtlCol="0" anchor="ctr">
-            <a:normAutofit/>
-          </a:bodyPr>
+          <a:bodyPr wrap="square" rtlCol="0" anchor="ctr"/>
           <a:lstStyle/>
           <a:p>
             <a:pPr indent="0" marL="0">
@@ -3605,9 +3497,7 @@
           </a:ln>
         </p:spPr>
         <p:txBody>
-          <a:bodyPr wrap="square">
-            <a:normAutofit/>
-          </a:bodyPr>
+          <a:bodyPr/>
           <a:p/>
         </p:txBody>
       </p:sp>
@@ -3638,9 +3528,7 @@
           </a:ln>
         </p:spPr>
         <p:txBody>
-          <a:bodyPr wrap="square">
-            <a:normAutofit/>
-          </a:bodyPr>
+          <a:bodyPr/>
           <a:p/>
         </p:txBody>
       </p:sp>
@@ -3662,9 +3550,7 @@
           <a:ln/>
         </p:spPr>
         <p:txBody>
-          <a:bodyPr wrap="square" rtlCol="0" anchor="ctr">
-            <a:normAutofit/>
-          </a:bodyPr>
+          <a:bodyPr wrap="square" rtlCol="0" anchor="ctr"/>
           <a:lstStyle/>
           <a:p>
             <a:pPr algn="ctr" indent="0" marL="0">
@@ -3703,9 +3589,7 @@
           <a:ln/>
         </p:spPr>
         <p:txBody>
-          <a:bodyPr wrap="square" rtlCol="0" anchor="ctr">
-            <a:normAutofit/>
-          </a:bodyPr>
+          <a:bodyPr wrap="square" rtlCol="0" anchor="ctr"/>
           <a:lstStyle/>
           <a:p>
             <a:pPr indent="0" marL="0">
@@ -3744,9 +3628,7 @@
           <a:ln/>
         </p:spPr>
         <p:txBody>
-          <a:bodyPr wrap="square" rtlCol="0" anchor="ctr">
-            <a:normAutofit/>
-          </a:bodyPr>
+          <a:bodyPr wrap="square" rtlCol="0" anchor="ctr"/>
           <a:lstStyle/>
           <a:p>
             <a:pPr algn="r" indent="0" marL="0">
@@ -3817,9 +3699,7 @@
           </a:ln>
         </p:spPr>
         <p:txBody>
-          <a:bodyPr wrap="square">
-            <a:normAutofit/>
-          </a:bodyPr>
+          <a:bodyPr/>
           <a:p/>
         </p:txBody>
       </p:sp>
@@ -3848,9 +3728,7 @@
           </a:ln>
         </p:spPr>
         <p:txBody>
-          <a:bodyPr wrap="square">
-            <a:normAutofit/>
-          </a:bodyPr>
+          <a:bodyPr/>
           <a:p/>
         </p:txBody>
       </p:sp>
@@ -3881,9 +3759,7 @@
           </a:ln>
         </p:spPr>
         <p:txBody>
-          <a:bodyPr wrap="square">
-            <a:normAutofit/>
-          </a:bodyPr>
+          <a:bodyPr/>
           <a:p/>
         </p:txBody>
       </p:sp>
@@ -3905,9 +3781,7 @@
           <a:ln/>
         </p:spPr>
         <p:txBody>
-          <a:bodyPr wrap="square" rtlCol="0" anchor="ctr">
-            <a:normAutofit/>
-          </a:bodyPr>
+          <a:bodyPr wrap="square" rtlCol="0" anchor="ctr"/>
           <a:lstStyle/>
           <a:p>
             <a:pPr algn="ctr" indent="0" marL="0">
@@ -3946,9 +3820,7 @@
           <a:ln/>
         </p:spPr>
         <p:txBody>
-          <a:bodyPr wrap="square" rtlCol="0" anchor="ctr">
-            <a:normAutofit/>
-          </a:bodyPr>
+          <a:bodyPr wrap="square" rtlCol="0" anchor="ctr"/>
           <a:lstStyle/>
           <a:p>
             <a:pPr indent="0" marL="0">
@@ -3987,9 +3859,7 @@
           <a:ln/>
         </p:spPr>
         <p:txBody>
-          <a:bodyPr wrap="square" rtlCol="0" anchor="ctr">
-            <a:normAutofit/>
-          </a:bodyPr>
+          <a:bodyPr wrap="square" rtlCol="0" anchor="ctr"/>
           <a:lstStyle/>
           <a:p>
             <a:pPr indent="0" marL="0">
@@ -4037,9 +3907,7 @@
           </a:ln>
         </p:spPr>
         <p:txBody>
-          <a:bodyPr wrap="square">
-            <a:normAutofit/>
-          </a:bodyPr>
+          <a:bodyPr/>
           <a:p/>
         </p:txBody>
       </p:sp>
@@ -4061,9 +3929,7 @@
           <a:ln/>
         </p:spPr>
         <p:txBody>
-          <a:bodyPr wrap="square" rtlCol="0" anchor="ctr">
-            <a:normAutofit/>
-          </a:bodyPr>
+          <a:bodyPr wrap="square" rtlCol="0" anchor="ctr"/>
           <a:lstStyle/>
           <a:p>
             <a:pPr indent="0" marL="0">
@@ -4102,9 +3968,7 @@
           <a:ln/>
         </p:spPr>
         <p:txBody>
-          <a:bodyPr wrap="square" rtlCol="0" anchor="t">
-            <a:normAutofit/>
-          </a:bodyPr>
+          <a:bodyPr wrap="square" rtlCol="0" anchor="t"/>
           <a:lstStyle/>
           <a:p>
             <a:pPr indent="0" marL="0">
@@ -4262,9 +4126,7 @@
           <a:ln/>
         </p:spPr>
         <p:txBody>
-          <a:bodyPr wrap="square" rtlCol="0" anchor="ctr">
-            <a:normAutofit/>
-          </a:bodyPr>
+          <a:bodyPr wrap="square" rtlCol="0" anchor="ctr"/>
           <a:lstStyle/>
           <a:p>
             <a:pPr algn="r" indent="0" marL="0">
@@ -4335,9 +4197,7 @@
           </a:ln>
         </p:spPr>
         <p:txBody>
-          <a:bodyPr wrap="square">
-            <a:normAutofit/>
-          </a:bodyPr>
+          <a:bodyPr/>
           <a:p/>
         </p:txBody>
       </p:sp>
@@ -4366,9 +4226,7 @@
           </a:ln>
         </p:spPr>
         <p:txBody>
-          <a:bodyPr wrap="square">
-            <a:normAutofit/>
-          </a:bodyPr>
+          <a:bodyPr/>
           <a:p/>
         </p:txBody>
       </p:sp>
@@ -4399,9 +4257,7 @@
           </a:ln>
         </p:spPr>
         <p:txBody>
-          <a:bodyPr wrap="square">
-            <a:normAutofit/>
-          </a:bodyPr>
+          <a:bodyPr/>
           <a:p/>
         </p:txBody>
       </p:sp>
@@ -4423,9 +4279,7 @@
           <a:ln/>
         </p:spPr>
         <p:txBody>
-          <a:bodyPr wrap="square" rtlCol="0" anchor="ctr">
-            <a:normAutofit/>
-          </a:bodyPr>
+          <a:bodyPr wrap="square" rtlCol="0" anchor="ctr"/>
           <a:lstStyle/>
           <a:p>
             <a:pPr algn="ctr" indent="0" marL="0">
@@ -4464,9 +4318,7 @@
           <a:ln/>
         </p:spPr>
         <p:txBody>
-          <a:bodyPr wrap="square" rtlCol="0" anchor="ctr">
-            <a:normAutofit/>
-          </a:bodyPr>
+          <a:bodyPr wrap="square" rtlCol="0" anchor="ctr"/>
           <a:lstStyle/>
           <a:p>
             <a:pPr indent="0" marL="0">
@@ -4505,9 +4357,7 @@
           <a:ln/>
         </p:spPr>
         <p:txBody>
-          <a:bodyPr wrap="square" rtlCol="0" anchor="ctr">
-            <a:normAutofit/>
-          </a:bodyPr>
+          <a:bodyPr wrap="square" rtlCol="0" anchor="ctr"/>
           <a:lstStyle/>
           <a:p>
             <a:pPr indent="0" marL="0">
@@ -4555,9 +4405,7 @@
           </a:ln>
         </p:spPr>
         <p:txBody>
-          <a:bodyPr wrap="square">
-            <a:normAutofit/>
-          </a:bodyPr>
+          <a:bodyPr/>
           <a:p/>
         </p:txBody>
       </p:sp>
@@ -4579,9 +4427,7 @@
           <a:ln/>
         </p:spPr>
         <p:txBody>
-          <a:bodyPr wrap="square" rtlCol="0" anchor="ctr">
-            <a:normAutofit/>
-          </a:bodyPr>
+          <a:bodyPr wrap="square" rtlCol="0" anchor="ctr"/>
           <a:lstStyle/>
           <a:p>
             <a:pPr indent="0" marL="0">
@@ -4620,9 +4466,7 @@
           <a:ln/>
         </p:spPr>
         <p:txBody>
-          <a:bodyPr wrap="square" rtlCol="0" anchor="ctr">
-            <a:normAutofit/>
-          </a:bodyPr>
+          <a:bodyPr wrap="square" rtlCol="0" anchor="ctr"/>
           <a:lstStyle/>
           <a:p>
             <a:pPr indent="0" marL="0">
@@ -4661,9 +4505,7 @@
           <a:ln/>
         </p:spPr>
         <p:txBody>
-          <a:bodyPr wrap="square" rtlCol="0" anchor="t">
-            <a:normAutofit/>
-          </a:bodyPr>
+          <a:bodyPr wrap="square" rtlCol="0" anchor="t"/>
           <a:lstStyle/>
           <a:p>
             <a:pPr indent="0" marL="0">
@@ -4702,9 +4544,7 @@
           <a:ln/>
         </p:spPr>
         <p:txBody>
-          <a:bodyPr wrap="square" rtlCol="0" anchor="ctr">
-            <a:normAutofit/>
-          </a:bodyPr>
+          <a:bodyPr wrap="square" rtlCol="0" anchor="ctr"/>
           <a:lstStyle/>
           <a:p>
             <a:pPr indent="0" marL="0">
@@ -4743,9 +4583,7 @@
           <a:ln/>
         </p:spPr>
         <p:txBody>
-          <a:bodyPr wrap="square" rtlCol="0" anchor="t">
-            <a:normAutofit/>
-          </a:bodyPr>
+          <a:bodyPr wrap="square" rtlCol="0" anchor="t"/>
           <a:lstStyle/>
           <a:p>
             <a:pPr indent="0" marL="0">
@@ -4784,9 +4622,7 @@
           <a:ln/>
         </p:spPr>
         <p:txBody>
-          <a:bodyPr wrap="square" rtlCol="0" anchor="ctr">
-            <a:normAutofit/>
-          </a:bodyPr>
+          <a:bodyPr wrap="square" rtlCol="0" anchor="ctr"/>
           <a:lstStyle/>
           <a:p>
             <a:pPr indent="0" marL="0">
@@ -4825,9 +4661,7 @@
           <a:ln/>
         </p:spPr>
         <p:txBody>
-          <a:bodyPr wrap="square" rtlCol="0" anchor="t">
-            <a:normAutofit/>
-          </a:bodyPr>
+          <a:bodyPr wrap="square" rtlCol="0" anchor="t"/>
           <a:lstStyle/>
           <a:p>
             <a:pPr indent="0" marL="0">
@@ -4875,9 +4709,7 @@
           </a:ln>
         </p:spPr>
         <p:txBody>
-          <a:bodyPr wrap="square">
-            <a:normAutofit/>
-          </a:bodyPr>
+          <a:bodyPr/>
           <a:p/>
         </p:txBody>
       </p:sp>
@@ -4899,9 +4731,7 @@
           <a:ln/>
         </p:spPr>
         <p:txBody>
-          <a:bodyPr wrap="square" rtlCol="0" anchor="ctr">
-            <a:normAutofit/>
-          </a:bodyPr>
+          <a:bodyPr wrap="square" rtlCol="0" anchor="ctr"/>
           <a:lstStyle/>
           <a:p>
             <a:pPr indent="0" marL="0">
@@ -4940,9 +4770,7 @@
           <a:ln/>
         </p:spPr>
         <p:txBody>
-          <a:bodyPr wrap="square" rtlCol="0" anchor="t">
-            <a:normAutofit/>
-          </a:bodyPr>
+          <a:bodyPr wrap="square" rtlCol="0" anchor="t"/>
           <a:lstStyle/>
           <a:p>
             <a:pPr indent="0" marL="0">
@@ -4981,9 +4809,7 @@
           <a:ln/>
         </p:spPr>
         <p:txBody>
-          <a:bodyPr wrap="square" rtlCol="0" anchor="t">
-            <a:normAutofit/>
-          </a:bodyPr>
+          <a:bodyPr wrap="square" rtlCol="0" anchor="t"/>
           <a:lstStyle/>
           <a:p>
             <a:pPr indent="0" marL="0">
@@ -5022,9 +4848,7 @@
           <a:ln/>
         </p:spPr>
         <p:txBody>
-          <a:bodyPr wrap="square" rtlCol="0" anchor="t">
-            <a:normAutofit/>
-          </a:bodyPr>
+          <a:bodyPr wrap="square" rtlCol="0" anchor="t"/>
           <a:lstStyle/>
           <a:p>
             <a:pPr indent="0" marL="0">
@@ -5063,9 +4887,7 @@
           <a:ln/>
         </p:spPr>
         <p:txBody>
-          <a:bodyPr wrap="square" rtlCol="0" anchor="ctr">
-            <a:normAutofit/>
-          </a:bodyPr>
+          <a:bodyPr wrap="square" rtlCol="0" anchor="ctr"/>
           <a:lstStyle/>
           <a:p>
             <a:pPr algn="r" indent="0" marL="0">
@@ -5136,9 +4958,7 @@
           </a:ln>
         </p:spPr>
         <p:txBody>
-          <a:bodyPr wrap="square">
-            <a:normAutofit/>
-          </a:bodyPr>
+          <a:bodyPr/>
           <a:p/>
         </p:txBody>
       </p:sp>
@@ -5167,9 +4987,7 @@
           </a:ln>
         </p:spPr>
         <p:txBody>
-          <a:bodyPr wrap="square">
-            <a:normAutofit/>
-          </a:bodyPr>
+          <a:bodyPr/>
           <a:p/>
         </p:txBody>
       </p:sp>
@@ -5200,9 +5018,7 @@
           </a:ln>
         </p:spPr>
         <p:txBody>
-          <a:bodyPr wrap="square">
-            <a:normAutofit/>
-          </a:bodyPr>
+          <a:bodyPr/>
           <a:p/>
         </p:txBody>
       </p:sp>
@@ -5224,9 +5040,7 @@
           <a:ln/>
         </p:spPr>
         <p:txBody>
-          <a:bodyPr wrap="square" rtlCol="0" anchor="ctr">
-            <a:normAutofit/>
-          </a:bodyPr>
+          <a:bodyPr wrap="square" rtlCol="0" anchor="ctr"/>
           <a:lstStyle/>
           <a:p>
             <a:pPr algn="ctr" indent="0" marL="0">
@@ -5265,9 +5079,7 @@
           <a:ln/>
         </p:spPr>
         <p:txBody>
-          <a:bodyPr wrap="square" rtlCol="0" anchor="ctr">
-            <a:normAutofit/>
-          </a:bodyPr>
+          <a:bodyPr wrap="square" rtlCol="0" anchor="ctr"/>
           <a:lstStyle/>
           <a:p>
             <a:pPr indent="0" marL="0">
@@ -5306,9 +5118,7 @@
           <a:ln/>
         </p:spPr>
         <p:txBody>
-          <a:bodyPr wrap="square" rtlCol="0" anchor="ctr">
-            <a:normAutofit/>
-          </a:bodyPr>
+          <a:bodyPr wrap="square" rtlCol="0" anchor="ctr"/>
           <a:lstStyle/>
           <a:p>
             <a:pPr indent="0" marL="0">
@@ -5356,9 +5166,7 @@
           </a:ln>
         </p:spPr>
         <p:txBody>
-          <a:bodyPr wrap="square">
-            <a:normAutofit/>
-          </a:bodyPr>
+          <a:bodyPr/>
           <a:p/>
         </p:txBody>
       </p:sp>
@@ -5380,9 +5188,7 @@
           <a:ln/>
         </p:spPr>
         <p:txBody>
-          <a:bodyPr wrap="square" rtlCol="0" anchor="ctr">
-            <a:normAutofit/>
-          </a:bodyPr>
+          <a:bodyPr wrap="square" rtlCol="0" anchor="ctr"/>
           <a:lstStyle/>
           <a:p>
             <a:pPr indent="0" marL="0">
@@ -5421,9 +5227,7 @@
           <a:ln/>
         </p:spPr>
         <p:txBody>
-          <a:bodyPr wrap="square" rtlCol="0" anchor="t">
-            <a:normAutofit/>
-          </a:bodyPr>
+          <a:bodyPr wrap="square" rtlCol="0" anchor="t"/>
           <a:lstStyle/>
           <a:p>
             <a:pPr indent="0" marL="0">
@@ -5751,9 +5555,7 @@
           <a:ln/>
         </p:spPr>
         <p:txBody>
-          <a:bodyPr wrap="square" rtlCol="0" anchor="ctr">
-            <a:normAutofit/>
-          </a:bodyPr>
+          <a:bodyPr wrap="square" rtlCol="0" anchor="ctr"/>
           <a:lstStyle/>
           <a:p>
             <a:pPr algn="r" indent="0" marL="0">
@@ -5824,9 +5626,7 @@
           </a:ln>
         </p:spPr>
         <p:txBody>
-          <a:bodyPr wrap="square">
-            <a:normAutofit/>
-          </a:bodyPr>
+          <a:bodyPr/>
           <a:p/>
         </p:txBody>
       </p:sp>
@@ -5855,9 +5655,7 @@
           </a:ln>
         </p:spPr>
         <p:txBody>
-          <a:bodyPr wrap="square">
-            <a:normAutofit/>
-          </a:bodyPr>
+          <a:bodyPr/>
           <a:p/>
         </p:txBody>
       </p:sp>
@@ -5888,9 +5686,7 @@
           </a:ln>
         </p:spPr>
         <p:txBody>
-          <a:bodyPr wrap="square">
-            <a:normAutofit/>
-          </a:bodyPr>
+          <a:bodyPr/>
           <a:p/>
         </p:txBody>
       </p:sp>
@@ -5912,9 +5708,7 @@
           <a:ln/>
         </p:spPr>
         <p:txBody>
-          <a:bodyPr wrap="square" rtlCol="0" anchor="ctr">
-            <a:normAutofit/>
-          </a:bodyPr>
+          <a:bodyPr wrap="square" rtlCol="0" anchor="ctr"/>
           <a:lstStyle/>
           <a:p>
             <a:pPr algn="ctr" indent="0" marL="0">
@@ -5953,9 +5747,7 @@
           <a:ln/>
         </p:spPr>
         <p:txBody>
-          <a:bodyPr wrap="square" rtlCol="0" anchor="ctr">
-            <a:normAutofit/>
-          </a:bodyPr>
+          <a:bodyPr wrap="square" rtlCol="0" anchor="ctr"/>
           <a:lstStyle/>
           <a:p>
             <a:pPr indent="0" marL="0">
@@ -5994,9 +5786,7 @@
           <a:ln/>
         </p:spPr>
         <p:txBody>
-          <a:bodyPr wrap="square" rtlCol="0" anchor="ctr">
-            <a:normAutofit/>
-          </a:bodyPr>
+          <a:bodyPr wrap="square" rtlCol="0" anchor="ctr"/>
           <a:lstStyle/>
           <a:p>
             <a:pPr indent="0" marL="0">
@@ -6044,9 +5834,7 @@
           </a:ln>
         </p:spPr>
         <p:txBody>
-          <a:bodyPr wrap="square">
-            <a:normAutofit/>
-          </a:bodyPr>
+          <a:bodyPr/>
           <a:p/>
         </p:txBody>
       </p:sp>
@@ -6068,9 +5856,7 @@
           <a:ln/>
         </p:spPr>
         <p:txBody>
-          <a:bodyPr wrap="square" rtlCol="0" anchor="ctr">
-            <a:normAutofit/>
-          </a:bodyPr>
+          <a:bodyPr wrap="square" rtlCol="0" anchor="ctr"/>
           <a:lstStyle/>
           <a:p>
             <a:pPr indent="0" marL="0">
@@ -6109,9 +5895,7 @@
           <a:ln/>
         </p:spPr>
         <p:txBody>
-          <a:bodyPr wrap="square" rtlCol="0" anchor="ctr">
-            <a:normAutofit/>
-          </a:bodyPr>
+          <a:bodyPr wrap="square" rtlCol="0" anchor="ctr"/>
           <a:lstStyle/>
           <a:p>
             <a:pPr indent="0" marL="0">
@@ -6150,9 +5934,7 @@
           <a:ln/>
         </p:spPr>
         <p:txBody>
-          <a:bodyPr wrap="square" rtlCol="0" anchor="t">
-            <a:normAutofit/>
-          </a:bodyPr>
+          <a:bodyPr wrap="square" rtlCol="0" anchor="t"/>
           <a:lstStyle/>
           <a:p>
             <a:pPr indent="0" marL="0">
@@ -6191,9 +5973,7 @@
           <a:ln/>
         </p:spPr>
         <p:txBody>
-          <a:bodyPr wrap="square" rtlCol="0" anchor="ctr">
-            <a:normAutofit/>
-          </a:bodyPr>
+          <a:bodyPr wrap="square" rtlCol="0" anchor="ctr"/>
           <a:lstStyle/>
           <a:p>
             <a:pPr indent="0" marL="0">
@@ -6232,9 +6012,7 @@
           <a:ln/>
         </p:spPr>
         <p:txBody>
-          <a:bodyPr wrap="square" rtlCol="0" anchor="t">
-            <a:normAutofit/>
-          </a:bodyPr>
+          <a:bodyPr wrap="square" rtlCol="0" anchor="t"/>
           <a:lstStyle/>
           <a:p>
             <a:pPr indent="0" marL="0">
@@ -6273,9 +6051,7 @@
           <a:ln/>
         </p:spPr>
         <p:txBody>
-          <a:bodyPr wrap="square" rtlCol="0" anchor="ctr">
-            <a:normAutofit/>
-          </a:bodyPr>
+          <a:bodyPr wrap="square" rtlCol="0" anchor="ctr"/>
           <a:lstStyle/>
           <a:p>
             <a:pPr indent="0" marL="0">
@@ -6314,9 +6090,7 @@
           <a:ln/>
         </p:spPr>
         <p:txBody>
-          <a:bodyPr wrap="square" rtlCol="0" anchor="t">
-            <a:normAutofit/>
-          </a:bodyPr>
+          <a:bodyPr wrap="square" rtlCol="0" anchor="t"/>
           <a:lstStyle/>
           <a:p>
             <a:pPr indent="0" marL="0">
@@ -6364,9 +6138,7 @@
           </a:ln>
         </p:spPr>
         <p:txBody>
-          <a:bodyPr wrap="square">
-            <a:normAutofit/>
-          </a:bodyPr>
+          <a:bodyPr/>
           <a:p/>
         </p:txBody>
       </p:sp>
@@ -6388,9 +6160,7 @@
           <a:ln/>
         </p:spPr>
         <p:txBody>
-          <a:bodyPr wrap="square" rtlCol="0" anchor="ctr">
-            <a:normAutofit/>
-          </a:bodyPr>
+          <a:bodyPr wrap="square" rtlCol="0" anchor="ctr"/>
           <a:lstStyle/>
           <a:p>
             <a:pPr indent="0" marL="0">
@@ -6429,9 +6199,7 @@
           <a:ln/>
         </p:spPr>
         <p:txBody>
-          <a:bodyPr wrap="square" rtlCol="0" anchor="t">
-            <a:normAutofit/>
-          </a:bodyPr>
+          <a:bodyPr wrap="square" rtlCol="0" anchor="t"/>
           <a:lstStyle/>
           <a:p>
             <a:pPr indent="0" marL="0">
@@ -6470,9 +6238,7 @@
           <a:ln/>
         </p:spPr>
         <p:txBody>
-          <a:bodyPr wrap="square" rtlCol="0" anchor="t">
-            <a:normAutofit/>
-          </a:bodyPr>
+          <a:bodyPr wrap="square" rtlCol="0" anchor="t"/>
           <a:lstStyle/>
           <a:p>
             <a:pPr indent="0" marL="0">
@@ -6511,9 +6277,7 @@
           <a:ln/>
         </p:spPr>
         <p:txBody>
-          <a:bodyPr wrap="square" rtlCol="0" anchor="t">
-            <a:normAutofit/>
-          </a:bodyPr>
+          <a:bodyPr wrap="square" rtlCol="0" anchor="t"/>
           <a:lstStyle/>
           <a:p>
             <a:pPr indent="0" marL="0">
@@ -6552,9 +6316,7 @@
           <a:ln/>
         </p:spPr>
         <p:txBody>
-          <a:bodyPr wrap="square" rtlCol="0" anchor="ctr">
-            <a:normAutofit/>
-          </a:bodyPr>
+          <a:bodyPr wrap="square" rtlCol="0" anchor="ctr"/>
           <a:lstStyle/>
           <a:p>
             <a:pPr algn="r" indent="0" marL="0">
@@ -6625,9 +6387,7 @@
           </a:ln>
         </p:spPr>
         <p:txBody>
-          <a:bodyPr wrap="square">
-            <a:normAutofit/>
-          </a:bodyPr>
+          <a:bodyPr/>
           <a:p/>
         </p:txBody>
       </p:sp>
@@ -6656,9 +6416,7 @@
           </a:ln>
         </p:spPr>
         <p:txBody>
-          <a:bodyPr wrap="square">
-            <a:normAutofit/>
-          </a:bodyPr>
+          <a:bodyPr/>
           <a:p/>
         </p:txBody>
       </p:sp>
@@ -6689,9 +6447,7 @@
           </a:ln>
         </p:spPr>
         <p:txBody>
-          <a:bodyPr wrap="square">
-            <a:normAutofit/>
-          </a:bodyPr>
+          <a:bodyPr/>
           <a:p/>
         </p:txBody>
       </p:sp>
@@ -6713,9 +6469,7 @@
           <a:ln/>
         </p:spPr>
         <p:txBody>
-          <a:bodyPr wrap="square" rtlCol="0" anchor="ctr">
-            <a:normAutofit/>
-          </a:bodyPr>
+          <a:bodyPr wrap="square" rtlCol="0" anchor="ctr"/>
           <a:lstStyle/>
           <a:p>
             <a:pPr algn="ctr" indent="0" marL="0">
@@ -6754,9 +6508,7 @@
           <a:ln/>
         </p:spPr>
         <p:txBody>
-          <a:bodyPr wrap="square" rtlCol="0" anchor="ctr">
-            <a:normAutofit/>
-          </a:bodyPr>
+          <a:bodyPr wrap="square" rtlCol="0" anchor="ctr"/>
           <a:lstStyle/>
           <a:p>
             <a:pPr indent="0" marL="0">
@@ -6795,9 +6547,7 @@
           <a:ln/>
         </p:spPr>
         <p:txBody>
-          <a:bodyPr wrap="square" rtlCol="0" anchor="ctr">
-            <a:normAutofit/>
-          </a:bodyPr>
+          <a:bodyPr wrap="square" rtlCol="0" anchor="ctr"/>
           <a:lstStyle/>
           <a:p>
             <a:pPr indent="0" marL="0">
@@ -6845,9 +6595,7 @@
           </a:ln>
         </p:spPr>
         <p:txBody>
-          <a:bodyPr wrap="square">
-            <a:normAutofit/>
-          </a:bodyPr>
+          <a:bodyPr/>
           <a:p/>
         </p:txBody>
       </p:sp>
@@ -6869,9 +6617,7 @@
           <a:ln/>
         </p:spPr>
         <p:txBody>
-          <a:bodyPr wrap="square" rtlCol="0" anchor="ctr">
-            <a:normAutofit/>
-          </a:bodyPr>
+          <a:bodyPr wrap="square" rtlCol="0" anchor="ctr"/>
           <a:lstStyle/>
           <a:p>
             <a:pPr indent="0" marL="0">
@@ -6910,9 +6656,7 @@
           <a:ln/>
         </p:spPr>
         <p:txBody>
-          <a:bodyPr wrap="square" rtlCol="0" anchor="ctr">
-            <a:normAutofit/>
-          </a:bodyPr>
+          <a:bodyPr wrap="square" rtlCol="0" anchor="ctr"/>
           <a:lstStyle/>
           <a:p>
             <a:pPr indent="0" marL="0">
@@ -6951,9 +6695,7 @@
           <a:ln/>
         </p:spPr>
         <p:txBody>
-          <a:bodyPr wrap="square" rtlCol="0" anchor="t">
-            <a:normAutofit/>
-          </a:bodyPr>
+          <a:bodyPr wrap="square" rtlCol="0" anchor="t"/>
           <a:lstStyle/>
           <a:p>
             <a:pPr indent="0" marL="0">
@@ -6992,9 +6734,7 @@
           <a:ln/>
         </p:spPr>
         <p:txBody>
-          <a:bodyPr wrap="square" rtlCol="0" anchor="ctr">
-            <a:normAutofit/>
-          </a:bodyPr>
+          <a:bodyPr wrap="square" rtlCol="0" anchor="ctr"/>
           <a:lstStyle/>
           <a:p>
             <a:pPr indent="0" marL="0">
@@ -7033,9 +6773,7 @@
           <a:ln/>
         </p:spPr>
         <p:txBody>
-          <a:bodyPr wrap="square" rtlCol="0" anchor="t">
-            <a:normAutofit/>
-          </a:bodyPr>
+          <a:bodyPr wrap="square" rtlCol="0" anchor="t"/>
           <a:lstStyle/>
           <a:p>
             <a:pPr indent="0" marL="0">
@@ -7074,9 +6812,7 @@
           <a:ln/>
         </p:spPr>
         <p:txBody>
-          <a:bodyPr wrap="square" rtlCol="0" anchor="ctr">
-            <a:normAutofit/>
-          </a:bodyPr>
+          <a:bodyPr wrap="square" rtlCol="0" anchor="ctr"/>
           <a:lstStyle/>
           <a:p>
             <a:pPr indent="0" marL="0">
@@ -7115,9 +6851,7 @@
           <a:ln/>
         </p:spPr>
         <p:txBody>
-          <a:bodyPr wrap="square" rtlCol="0" anchor="t">
-            <a:normAutofit/>
-          </a:bodyPr>
+          <a:bodyPr wrap="square" rtlCol="0" anchor="t"/>
           <a:lstStyle/>
           <a:p>
             <a:pPr indent="0" marL="0">
@@ -7165,9 +6899,7 @@
           </a:ln>
         </p:spPr>
         <p:txBody>
-          <a:bodyPr wrap="square">
-            <a:normAutofit/>
-          </a:bodyPr>
+          <a:bodyPr/>
           <a:p/>
         </p:txBody>
       </p:sp>
@@ -7189,9 +6921,7 @@
           <a:ln/>
         </p:spPr>
         <p:txBody>
-          <a:bodyPr wrap="square" rtlCol="0" anchor="ctr">
-            <a:normAutofit/>
-          </a:bodyPr>
+          <a:bodyPr wrap="square" rtlCol="0" anchor="ctr"/>
           <a:lstStyle/>
           <a:p>
             <a:pPr indent="0" marL="0">
@@ -7230,9 +6960,7 @@
           <a:ln/>
         </p:spPr>
         <p:txBody>
-          <a:bodyPr wrap="square" rtlCol="0" anchor="t">
-            <a:normAutofit/>
-          </a:bodyPr>
+          <a:bodyPr wrap="square" rtlCol="0" anchor="t"/>
           <a:lstStyle/>
           <a:p>
             <a:pPr indent="0" marL="0">
@@ -7271,9 +6999,7 @@
           <a:ln/>
         </p:spPr>
         <p:txBody>
-          <a:bodyPr wrap="square" rtlCol="0" anchor="t">
-            <a:normAutofit/>
-          </a:bodyPr>
+          <a:bodyPr wrap="square" rtlCol="0" anchor="t"/>
           <a:lstStyle/>
           <a:p>
             <a:pPr indent="0" marL="0">
@@ -7312,9 +7038,7 @@
           <a:ln/>
         </p:spPr>
         <p:txBody>
-          <a:bodyPr wrap="square" rtlCol="0" anchor="t">
-            <a:normAutofit/>
-          </a:bodyPr>
+          <a:bodyPr wrap="square" rtlCol="0" anchor="t"/>
           <a:lstStyle/>
           <a:p>
             <a:pPr indent="0" marL="0">
@@ -7353,9 +7077,7 @@
           <a:ln/>
         </p:spPr>
         <p:txBody>
-          <a:bodyPr wrap="square" rtlCol="0" anchor="ctr">
-            <a:normAutofit/>
-          </a:bodyPr>
+          <a:bodyPr wrap="square" rtlCol="0" anchor="ctr"/>
           <a:lstStyle/>
           <a:p>
             <a:pPr algn="r" indent="0" marL="0">
